--- a/templates/template_report.pptx
+++ b/templates/template_report.pptx
@@ -8,6 +8,8 @@
     <p:sldId id="256" r:id="rId7"/>
     <p:sldId id="257" r:id="rId8"/>
     <p:sldId id="258" r:id="rId9"/>
+    <p:sldId id="259" r:id="rId10"/>
+    <p:sldId id="260" r:id="rId11"/>
   </p:sldIdLst>
   <p:sldSz cx="12191695" cy="6858000" type="screen4x3"/>
   <p:notesSz cx="6858000" cy="9144000"/>
@@ -3244,7 +3246,7 @@
               </a:defRPr>
             </a:pPr>
             <a:r>
-              <a:t>2026-06-18 15:54</a:t>
+              <a:t>2026-06-18 16:05</a:t>
             </a:r>
           </a:p>
         </p:txBody>
@@ -4198,6 +4200,1278 @@
 </file>
 
 <file path=ppt/slides/slide3.xml><?xml version="1.0" encoding="utf-8"?>
+<p:sld xmlns:a="http://schemas.openxmlformats.org/drawingml/2006/main" xmlns:p="http://schemas.openxmlformats.org/presentationml/2006/main" xmlns:r="http://schemas.openxmlformats.org/officeDocument/2006/relationships">
+  <p:cSld>
+    <p:spTree>
+      <p:nvGrpSpPr>
+        <p:cNvPr id="1" name=""/>
+        <p:cNvGrpSpPr/>
+        <p:nvPr/>
+      </p:nvGrpSpPr>
+      <p:grpSpPr/>
+      <p:sp>
+        <p:nvSpPr>
+          <p:cNvPr id="2" name="TextBox 1"/>
+          <p:cNvSpPr txBox="1"/>
+          <p:nvPr/>
+        </p:nvSpPr>
+        <p:spPr>
+          <a:xfrm>
+            <a:off x="502920" y="292608"/>
+            <a:ext cx="10789920" cy="411480"/>
+          </a:xfrm>
+          <a:prstGeom prst="rect">
+            <a:avLst/>
+          </a:prstGeom>
+          <a:noFill/>
+        </p:spPr>
+        <p:txBody>
+          <a:bodyPr wrap="square">
+            <a:spAutoFit/>
+          </a:bodyPr>
+          <a:lstStyle/>
+          <a:p>
+            <a:pPr>
+              <a:defRPr sz="2400" b="1">
+                <a:solidFill>
+                  <a:srgbClr val="0B1F33"/>
+                </a:solidFill>
+                <a:latin typeface="Arial"/>
+              </a:defRPr>
+            </a:pPr>
+            <a:r>
+              <a:t>Score Board - Index 1</a:t>
+            </a:r>
+          </a:p>
+        </p:txBody>
+      </p:sp>
+      <p:sp>
+        <p:nvSpPr>
+          <p:cNvPr id="3" name="Rectangle 2"/>
+          <p:cNvSpPr/>
+          <p:nvPr/>
+        </p:nvSpPr>
+        <p:spPr>
+          <a:xfrm>
+            <a:off x="502920" y="786384"/>
+            <a:ext cx="1143000" cy="45720"/>
+          </a:xfrm>
+          <a:prstGeom prst="rect">
+            <a:avLst/>
+          </a:prstGeom>
+          <a:solidFill>
+            <a:srgbClr val="00A3A3"/>
+          </a:solidFill>
+          <a:ln>
+            <a:noFill/>
+          </a:ln>
+        </p:spPr>
+        <p:style>
+          <a:lnRef idx="1">
+            <a:schemeClr val="accent1"/>
+          </a:lnRef>
+          <a:fillRef idx="3">
+            <a:schemeClr val="accent1"/>
+          </a:fillRef>
+          <a:effectRef idx="2">
+            <a:schemeClr val="accent1"/>
+          </a:effectRef>
+          <a:fontRef idx="minor">
+            <a:schemeClr val="lt1"/>
+          </a:fontRef>
+        </p:style>
+        <p:txBody>
+          <a:bodyPr rtlCol="0" anchor="ctr"/>
+          <a:lstStyle/>
+          <a:p>
+            <a:pPr algn="ctr"/>
+          </a:p>
+        </p:txBody>
+      </p:sp>
+      <p:sp>
+        <p:nvSpPr>
+          <p:cNvPr id="4" name="TextBox 3"/>
+          <p:cNvSpPr txBox="1"/>
+          <p:nvPr/>
+        </p:nvSpPr>
+        <p:spPr>
+          <a:xfrm>
+            <a:off x="1783080" y="704088"/>
+            <a:ext cx="9509760" cy="228600"/>
+          </a:xfrm>
+          <a:prstGeom prst="rect">
+            <a:avLst/>
+          </a:prstGeom>
+          <a:noFill/>
+        </p:spPr>
+        <p:txBody>
+          <a:bodyPr wrap="square">
+            <a:spAutoFit/>
+          </a:bodyPr>
+          <a:lstStyle/>
+          <a:p>
+            <a:pPr>
+              <a:defRPr sz="1000" b="0">
+                <a:solidFill>
+                  <a:srgbClr val="6B7280"/>
+                </a:solidFill>
+                <a:latin typeface="Arial"/>
+              </a:defRPr>
+            </a:pPr>
+            <a:r>
+              <a:t>Wafer-level pass score by ADDP/reformatted index</a:t>
+            </a:r>
+          </a:p>
+        </p:txBody>
+      </p:sp>
+      <p:graphicFrame>
+        <p:nvGraphicFramePr>
+          <p:cNvPr id="5" name="Table 4"/>
+          <p:cNvGraphicFramePr>
+            <a:graphicFrameLocks noGrp="1"/>
+          </p:cNvGraphicFramePr>
+          <p:nvPr/>
+        </p:nvGraphicFramePr>
+        <p:xfrm>
+          <a:off x="502920" y="1143000"/>
+          <a:ext cx="11201400" cy="4480560"/>
+        </p:xfrm>
+        <a:graphic>
+          <a:graphicData uri="http://schemas.openxmlformats.org/drawingml/2006/table">
+            <a:tbl>
+              <a:tblPr firstRow="1" bandRow="1">
+                <a:tableStyleId>{5C22544A-7EE6-4342-B048-85BDC9FD1C3A}</a:tableStyleId>
+              </a:tblPr>
+              <a:tblGrid>
+                <a:gridCol w="2800350"/>
+                <a:gridCol w="2800350"/>
+                <a:gridCol w="2800350"/>
+                <a:gridCol w="2800350"/>
+              </a:tblGrid>
+              <a:tr h="2240280">
+                <a:tc>
+                  <a:txBody>
+                    <a:bodyPr/>
+                    <a:lstStyle/>
+                    <a:p>
+                      <a:pPr algn="ctr">
+                        <a:defRPr sz="800" b="1">
+                          <a:solidFill>
+                            <a:srgbClr val="FFFFFF"/>
+                          </a:solidFill>
+                          <a:latin typeface="Arial"/>
+                        </a:defRPr>
+                      </a:pPr>
+                      <a:r>
+                        <a:t>Index</a:t>
+                      </a:r>
+                    </a:p>
+                  </a:txBody>
+                  <a:tcPr>
+                    <a:solidFill>
+                      <a:srgbClr val="0B1F33"/>
+                    </a:solidFill>
+                  </a:tcPr>
+                </a:tc>
+                <a:tc>
+                  <a:txBody>
+                    <a:bodyPr/>
+                    <a:lstStyle/>
+                    <a:p>
+                      <a:pPr algn="ctr">
+                        <a:defRPr sz="800" b="1">
+                          <a:solidFill>
+                            <a:srgbClr val="FFFFFF"/>
+                          </a:solidFill>
+                          <a:latin typeface="Arial"/>
+                        </a:defRPr>
+                      </a:pPr>
+                      <a:r>
+                        <a:t>W01</a:t>
+                      </a:r>
+                    </a:p>
+                  </a:txBody>
+                  <a:tcPr>
+                    <a:solidFill>
+                      <a:srgbClr val="0B1F33"/>
+                    </a:solidFill>
+                  </a:tcPr>
+                </a:tc>
+                <a:tc>
+                  <a:txBody>
+                    <a:bodyPr/>
+                    <a:lstStyle/>
+                    <a:p>
+                      <a:pPr algn="ctr">
+                        <a:defRPr sz="800" b="1">
+                          <a:solidFill>
+                            <a:srgbClr val="FFFFFF"/>
+                          </a:solidFill>
+                          <a:latin typeface="Arial"/>
+                        </a:defRPr>
+                      </a:pPr>
+                      <a:r>
+                        <a:t>W02</a:t>
+                      </a:r>
+                    </a:p>
+                  </a:txBody>
+                  <a:tcPr>
+                    <a:solidFill>
+                      <a:srgbClr val="0B1F33"/>
+                    </a:solidFill>
+                  </a:tcPr>
+                </a:tc>
+                <a:tc>
+                  <a:txBody>
+                    <a:bodyPr/>
+                    <a:lstStyle/>
+                    <a:p>
+                      <a:pPr algn="ctr">
+                        <a:defRPr sz="800" b="1">
+                          <a:solidFill>
+                            <a:srgbClr val="FFFFFF"/>
+                          </a:solidFill>
+                          <a:latin typeface="Arial"/>
+                        </a:defRPr>
+                      </a:pPr>
+                      <a:r>
+                        <a:t>W03</a:t>
+                      </a:r>
+                    </a:p>
+                  </a:txBody>
+                  <a:tcPr>
+                    <a:solidFill>
+                      <a:srgbClr val="0B1F33"/>
+                    </a:solidFill>
+                  </a:tcPr>
+                </a:tc>
+              </a:tr>
+              <a:tr h="2240280">
+                <a:tc>
+                  <a:txBody>
+                    <a:bodyPr/>
+                    <a:lstStyle/>
+                    <a:p>
+                      <a:pPr algn="ctr">
+                        <a:defRPr sz="800">
+                          <a:solidFill>
+                            <a:srgbClr val="1F2937"/>
+                          </a:solidFill>
+                          <a:latin typeface="Arial"/>
+                        </a:defRPr>
+                      </a:pPr>
+                      <a:r>
+                        <a:t>ADDP_ITEM_01</a:t>
+                      </a:r>
+                    </a:p>
+                  </a:txBody>
+                  <a:tcPr>
+                    <a:solidFill>
+                      <a:srgbClr val="F8FAFC"/>
+                    </a:solidFill>
+                  </a:tcPr>
+                </a:tc>
+                <a:tc>
+                  <a:txBody>
+                    <a:bodyPr/>
+                    <a:lstStyle/>
+                    <a:p>
+                      <a:pPr algn="ctr">
+                        <a:defRPr sz="800">
+                          <a:solidFill>
+                            <a:srgbClr val="1F2937"/>
+                          </a:solidFill>
+                          <a:latin typeface="Arial"/>
+                        </a:defRPr>
+                      </a:pPr>
+                      <a:r>
+                        <a:t>100</a:t>
+                      </a:r>
+                    </a:p>
+                  </a:txBody>
+                  <a:tcPr>
+                    <a:solidFill>
+                      <a:srgbClr val="DCFCE7"/>
+                    </a:solidFill>
+                  </a:tcPr>
+                </a:tc>
+                <a:tc>
+                  <a:txBody>
+                    <a:bodyPr/>
+                    <a:lstStyle/>
+                    <a:p>
+                      <a:pPr algn="ctr">
+                        <a:defRPr sz="800">
+                          <a:solidFill>
+                            <a:srgbClr val="1F2937"/>
+                          </a:solidFill>
+                          <a:latin typeface="Arial"/>
+                        </a:defRPr>
+                      </a:pPr>
+                      <a:r>
+                        <a:t>100</a:t>
+                      </a:r>
+                    </a:p>
+                  </a:txBody>
+                  <a:tcPr>
+                    <a:solidFill>
+                      <a:srgbClr val="DCFCE7"/>
+                    </a:solidFill>
+                  </a:tcPr>
+                </a:tc>
+                <a:tc>
+                  <a:txBody>
+                    <a:bodyPr/>
+                    <a:lstStyle/>
+                    <a:p>
+                      <a:pPr algn="ctr">
+                        <a:defRPr sz="800">
+                          <a:solidFill>
+                            <a:srgbClr val="1F2937"/>
+                          </a:solidFill>
+                          <a:latin typeface="Arial"/>
+                        </a:defRPr>
+                      </a:pPr>
+                      <a:r>
+                        <a:t>100</a:t>
+                      </a:r>
+                    </a:p>
+                  </a:txBody>
+                  <a:tcPr>
+                    <a:solidFill>
+                      <a:srgbClr val="DCFCE7"/>
+                    </a:solidFill>
+                  </a:tcPr>
+                </a:tc>
+              </a:tr>
+            </a:tbl>
+          </a:graphicData>
+        </a:graphic>
+      </p:graphicFrame>
+      <p:sp>
+        <p:nvSpPr>
+          <p:cNvPr id="6" name="Rectangle 5"/>
+          <p:cNvSpPr/>
+          <p:nvPr/>
+        </p:nvSpPr>
+        <p:spPr>
+          <a:xfrm>
+            <a:off x="594360" y="5806440"/>
+            <a:ext cx="228600" cy="164592"/>
+          </a:xfrm>
+          <a:prstGeom prst="rect">
+            <a:avLst/>
+          </a:prstGeom>
+          <a:solidFill>
+            <a:srgbClr val="DCFCE7"/>
+          </a:solidFill>
+          <a:ln>
+            <a:solidFill>
+              <a:srgbClr val="CBD5E1"/>
+            </a:solidFill>
+          </a:ln>
+        </p:spPr>
+        <p:style>
+          <a:lnRef idx="1">
+            <a:schemeClr val="accent1"/>
+          </a:lnRef>
+          <a:fillRef idx="3">
+            <a:schemeClr val="accent1"/>
+          </a:fillRef>
+          <a:effectRef idx="2">
+            <a:schemeClr val="accent1"/>
+          </a:effectRef>
+          <a:fontRef idx="minor">
+            <a:schemeClr val="lt1"/>
+          </a:fontRef>
+        </p:style>
+        <p:txBody>
+          <a:bodyPr rtlCol="0" anchor="ctr"/>
+          <a:lstStyle/>
+          <a:p>
+            <a:pPr algn="ctr"/>
+          </a:p>
+        </p:txBody>
+      </p:sp>
+      <p:sp>
+        <p:nvSpPr>
+          <p:cNvPr id="7" name="TextBox 6"/>
+          <p:cNvSpPr txBox="1"/>
+          <p:nvPr/>
+        </p:nvSpPr>
+        <p:spPr>
+          <a:xfrm>
+            <a:off x="886968" y="5742432"/>
+            <a:ext cx="777240" cy="228600"/>
+          </a:xfrm>
+          <a:prstGeom prst="rect">
+            <a:avLst/>
+          </a:prstGeom>
+          <a:noFill/>
+        </p:spPr>
+        <p:txBody>
+          <a:bodyPr wrap="square">
+            <a:spAutoFit/>
+          </a:bodyPr>
+          <a:lstStyle/>
+          <a:p>
+            <a:pPr>
+              <a:defRPr sz="800" b="0">
+                <a:solidFill>
+                  <a:srgbClr val="6B7280"/>
+                </a:solidFill>
+                <a:latin typeface="Arial"/>
+              </a:defRPr>
+            </a:pPr>
+            <a:r>
+              <a:t>&gt;=95</a:t>
+            </a:r>
+          </a:p>
+        </p:txBody>
+      </p:sp>
+      <p:sp>
+        <p:nvSpPr>
+          <p:cNvPr id="8" name="Rectangle 7"/>
+          <p:cNvSpPr/>
+          <p:nvPr/>
+        </p:nvSpPr>
+        <p:spPr>
+          <a:xfrm>
+            <a:off x="1737360" y="5806440"/>
+            <a:ext cx="228600" cy="164592"/>
+          </a:xfrm>
+          <a:prstGeom prst="rect">
+            <a:avLst/>
+          </a:prstGeom>
+          <a:solidFill>
+            <a:srgbClr val="FEF9C3"/>
+          </a:solidFill>
+          <a:ln>
+            <a:solidFill>
+              <a:srgbClr val="CBD5E1"/>
+            </a:solidFill>
+          </a:ln>
+        </p:spPr>
+        <p:style>
+          <a:lnRef idx="1">
+            <a:schemeClr val="accent1"/>
+          </a:lnRef>
+          <a:fillRef idx="3">
+            <a:schemeClr val="accent1"/>
+          </a:fillRef>
+          <a:effectRef idx="2">
+            <a:schemeClr val="accent1"/>
+          </a:effectRef>
+          <a:fontRef idx="minor">
+            <a:schemeClr val="lt1"/>
+          </a:fontRef>
+        </p:style>
+        <p:txBody>
+          <a:bodyPr rtlCol="0" anchor="ctr"/>
+          <a:lstStyle/>
+          <a:p>
+            <a:pPr algn="ctr"/>
+          </a:p>
+        </p:txBody>
+      </p:sp>
+      <p:sp>
+        <p:nvSpPr>
+          <p:cNvPr id="9" name="TextBox 8"/>
+          <p:cNvSpPr txBox="1"/>
+          <p:nvPr/>
+        </p:nvSpPr>
+        <p:spPr>
+          <a:xfrm>
+            <a:off x="2029968" y="5742432"/>
+            <a:ext cx="777240" cy="228600"/>
+          </a:xfrm>
+          <a:prstGeom prst="rect">
+            <a:avLst/>
+          </a:prstGeom>
+          <a:noFill/>
+        </p:spPr>
+        <p:txBody>
+          <a:bodyPr wrap="square">
+            <a:spAutoFit/>
+          </a:bodyPr>
+          <a:lstStyle/>
+          <a:p>
+            <a:pPr>
+              <a:defRPr sz="800" b="0">
+                <a:solidFill>
+                  <a:srgbClr val="6B7280"/>
+                </a:solidFill>
+                <a:latin typeface="Arial"/>
+              </a:defRPr>
+            </a:pPr>
+            <a:r>
+              <a:t>80-94.9</a:t>
+            </a:r>
+          </a:p>
+        </p:txBody>
+      </p:sp>
+      <p:sp>
+        <p:nvSpPr>
+          <p:cNvPr id="10" name="Rectangle 9"/>
+          <p:cNvSpPr/>
+          <p:nvPr/>
+        </p:nvSpPr>
+        <p:spPr>
+          <a:xfrm>
+            <a:off x="2880360" y="5806440"/>
+            <a:ext cx="228600" cy="164592"/>
+          </a:xfrm>
+          <a:prstGeom prst="rect">
+            <a:avLst/>
+          </a:prstGeom>
+          <a:solidFill>
+            <a:srgbClr val="FEE2E2"/>
+          </a:solidFill>
+          <a:ln>
+            <a:solidFill>
+              <a:srgbClr val="CBD5E1"/>
+            </a:solidFill>
+          </a:ln>
+        </p:spPr>
+        <p:style>
+          <a:lnRef idx="1">
+            <a:schemeClr val="accent1"/>
+          </a:lnRef>
+          <a:fillRef idx="3">
+            <a:schemeClr val="accent1"/>
+          </a:fillRef>
+          <a:effectRef idx="2">
+            <a:schemeClr val="accent1"/>
+          </a:effectRef>
+          <a:fontRef idx="minor">
+            <a:schemeClr val="lt1"/>
+          </a:fontRef>
+        </p:style>
+        <p:txBody>
+          <a:bodyPr rtlCol="0" anchor="ctr"/>
+          <a:lstStyle/>
+          <a:p>
+            <a:pPr algn="ctr"/>
+          </a:p>
+        </p:txBody>
+      </p:sp>
+      <p:sp>
+        <p:nvSpPr>
+          <p:cNvPr id="11" name="TextBox 10"/>
+          <p:cNvSpPr txBox="1"/>
+          <p:nvPr/>
+        </p:nvSpPr>
+        <p:spPr>
+          <a:xfrm>
+            <a:off x="3172968" y="5742432"/>
+            <a:ext cx="777240" cy="228600"/>
+          </a:xfrm>
+          <a:prstGeom prst="rect">
+            <a:avLst/>
+          </a:prstGeom>
+          <a:noFill/>
+        </p:spPr>
+        <p:txBody>
+          <a:bodyPr wrap="square">
+            <a:spAutoFit/>
+          </a:bodyPr>
+          <a:lstStyle/>
+          <a:p>
+            <a:pPr>
+              <a:defRPr sz="800" b="0">
+                <a:solidFill>
+                  <a:srgbClr val="6B7280"/>
+                </a:solidFill>
+                <a:latin typeface="Arial"/>
+              </a:defRPr>
+            </a:pPr>
+            <a:r>
+              <a:t>&lt;80</a:t>
+            </a:r>
+          </a:p>
+        </p:txBody>
+      </p:sp>
+      <p:sp>
+        <p:nvSpPr>
+          <p:cNvPr id="12" name="TextBox 11"/>
+          <p:cNvSpPr txBox="1"/>
+          <p:nvPr/>
+        </p:nvSpPr>
+        <p:spPr>
+          <a:xfrm>
+            <a:off x="411480" y="6446520"/>
+            <a:ext cx="11338560" cy="228600"/>
+          </a:xfrm>
+          <a:prstGeom prst="rect">
+            <a:avLst/>
+          </a:prstGeom>
+          <a:noFill/>
+        </p:spPr>
+        <p:txBody>
+          <a:bodyPr wrap="square">
+            <a:spAutoFit/>
+          </a:bodyPr>
+          <a:lstStyle/>
+          <a:p>
+            <a:pPr>
+              <a:defRPr sz="800" b="0">
+                <a:solidFill>
+                  <a:srgbClr val="6B7280"/>
+                </a:solidFill>
+                <a:latin typeface="Arial"/>
+              </a:defRPr>
+            </a:pPr>
+            <a:r>
+              <a:t>Index 1 example uses per-wafer pass rate against reformatter spec limits.</a:t>
+            </a:r>
+          </a:p>
+        </p:txBody>
+      </p:sp>
+    </p:spTree>
+  </p:cSld>
+  <p:clrMapOvr>
+    <a:masterClrMapping/>
+  </p:clrMapOvr>
+</p:sld>
+</file>
+
+<file path=ppt/slides/slide4.xml><?xml version="1.0" encoding="utf-8"?>
+<p:sld xmlns:a="http://schemas.openxmlformats.org/drawingml/2006/main" xmlns:p="http://schemas.openxmlformats.org/presentationml/2006/main" xmlns:r="http://schemas.openxmlformats.org/officeDocument/2006/relationships">
+  <p:cSld>
+    <p:spTree>
+      <p:nvGrpSpPr>
+        <p:cNvPr id="1" name=""/>
+        <p:cNvGrpSpPr/>
+        <p:nvPr/>
+      </p:nvGrpSpPr>
+      <p:grpSpPr/>
+      <p:sp>
+        <p:nvSpPr>
+          <p:cNvPr id="2" name="TextBox 1"/>
+          <p:cNvSpPr txBox="1"/>
+          <p:nvPr/>
+        </p:nvSpPr>
+        <p:spPr>
+          <a:xfrm>
+            <a:off x="502920" y="292608"/>
+            <a:ext cx="10789920" cy="411480"/>
+          </a:xfrm>
+          <a:prstGeom prst="rect">
+            <a:avLst/>
+          </a:prstGeom>
+          <a:noFill/>
+        </p:spPr>
+        <p:txBody>
+          <a:bodyPr wrap="square">
+            <a:spAutoFit/>
+          </a:bodyPr>
+          <a:lstStyle/>
+          <a:p>
+            <a:pPr>
+              <a:defRPr sz="2400" b="1">
+                <a:solidFill>
+                  <a:srgbClr val="0B1F33"/>
+                </a:solidFill>
+                <a:latin typeface="Arial"/>
+              </a:defRPr>
+            </a:pPr>
+            <a:r>
+              <a:t>Score Board - Index 2</a:t>
+            </a:r>
+          </a:p>
+        </p:txBody>
+      </p:sp>
+      <p:sp>
+        <p:nvSpPr>
+          <p:cNvPr id="3" name="Rectangle 2"/>
+          <p:cNvSpPr/>
+          <p:nvPr/>
+        </p:nvSpPr>
+        <p:spPr>
+          <a:xfrm>
+            <a:off x="502920" y="786384"/>
+            <a:ext cx="1143000" cy="45720"/>
+          </a:xfrm>
+          <a:prstGeom prst="rect">
+            <a:avLst/>
+          </a:prstGeom>
+          <a:solidFill>
+            <a:srgbClr val="00A3A3"/>
+          </a:solidFill>
+          <a:ln>
+            <a:noFill/>
+          </a:ln>
+        </p:spPr>
+        <p:style>
+          <a:lnRef idx="1">
+            <a:schemeClr val="accent1"/>
+          </a:lnRef>
+          <a:fillRef idx="3">
+            <a:schemeClr val="accent1"/>
+          </a:fillRef>
+          <a:effectRef idx="2">
+            <a:schemeClr val="accent1"/>
+          </a:effectRef>
+          <a:fontRef idx="minor">
+            <a:schemeClr val="lt1"/>
+          </a:fontRef>
+        </p:style>
+        <p:txBody>
+          <a:bodyPr rtlCol="0" anchor="ctr"/>
+          <a:lstStyle/>
+          <a:p>
+            <a:pPr algn="ctr"/>
+          </a:p>
+        </p:txBody>
+      </p:sp>
+      <p:sp>
+        <p:nvSpPr>
+          <p:cNvPr id="4" name="TextBox 3"/>
+          <p:cNvSpPr txBox="1"/>
+          <p:nvPr/>
+        </p:nvSpPr>
+        <p:spPr>
+          <a:xfrm>
+            <a:off x="1783080" y="704088"/>
+            <a:ext cx="9509760" cy="228600"/>
+          </a:xfrm>
+          <a:prstGeom prst="rect">
+            <a:avLst/>
+          </a:prstGeom>
+          <a:noFill/>
+        </p:spPr>
+        <p:txBody>
+          <a:bodyPr wrap="square">
+            <a:spAutoFit/>
+          </a:bodyPr>
+          <a:lstStyle/>
+          <a:p>
+            <a:pPr>
+              <a:defRPr sz="1000" b="0">
+                <a:solidFill>
+                  <a:srgbClr val="6B7280"/>
+                </a:solidFill>
+                <a:latin typeface="Arial"/>
+              </a:defRPr>
+            </a:pPr>
+            <a:r>
+              <a:t>Wafer-level median value by ADDP/reformatted index</a:t>
+            </a:r>
+          </a:p>
+        </p:txBody>
+      </p:sp>
+      <p:graphicFrame>
+        <p:nvGraphicFramePr>
+          <p:cNvPr id="5" name="Table 4"/>
+          <p:cNvGraphicFramePr>
+            <a:graphicFrameLocks noGrp="1"/>
+          </p:cNvGraphicFramePr>
+          <p:nvPr/>
+        </p:nvGraphicFramePr>
+        <p:xfrm>
+          <a:off x="502920" y="1143000"/>
+          <a:ext cx="11201400" cy="4480560"/>
+        </p:xfrm>
+        <a:graphic>
+          <a:graphicData uri="http://schemas.openxmlformats.org/drawingml/2006/table">
+            <a:tbl>
+              <a:tblPr firstRow="1" bandRow="1">
+                <a:tableStyleId>{5C22544A-7EE6-4342-B048-85BDC9FD1C3A}</a:tableStyleId>
+              </a:tblPr>
+              <a:tblGrid>
+                <a:gridCol w="2800350"/>
+                <a:gridCol w="2800350"/>
+                <a:gridCol w="2800350"/>
+                <a:gridCol w="2800350"/>
+              </a:tblGrid>
+              <a:tr h="2240280">
+                <a:tc>
+                  <a:txBody>
+                    <a:bodyPr/>
+                    <a:lstStyle/>
+                    <a:p>
+                      <a:pPr algn="ctr">
+                        <a:defRPr sz="800" b="1">
+                          <a:solidFill>
+                            <a:srgbClr val="FFFFFF"/>
+                          </a:solidFill>
+                          <a:latin typeface="Arial"/>
+                        </a:defRPr>
+                      </a:pPr>
+                      <a:r>
+                        <a:t>Index</a:t>
+                      </a:r>
+                    </a:p>
+                  </a:txBody>
+                  <a:tcPr>
+                    <a:solidFill>
+                      <a:srgbClr val="0B1F33"/>
+                    </a:solidFill>
+                  </a:tcPr>
+                </a:tc>
+                <a:tc>
+                  <a:txBody>
+                    <a:bodyPr/>
+                    <a:lstStyle/>
+                    <a:p>
+                      <a:pPr algn="ctr">
+                        <a:defRPr sz="800" b="1">
+                          <a:solidFill>
+                            <a:srgbClr val="FFFFFF"/>
+                          </a:solidFill>
+                          <a:latin typeface="Arial"/>
+                        </a:defRPr>
+                      </a:pPr>
+                      <a:r>
+                        <a:t>W01</a:t>
+                      </a:r>
+                    </a:p>
+                  </a:txBody>
+                  <a:tcPr>
+                    <a:solidFill>
+                      <a:srgbClr val="0B1F33"/>
+                    </a:solidFill>
+                  </a:tcPr>
+                </a:tc>
+                <a:tc>
+                  <a:txBody>
+                    <a:bodyPr/>
+                    <a:lstStyle/>
+                    <a:p>
+                      <a:pPr algn="ctr">
+                        <a:defRPr sz="800" b="1">
+                          <a:solidFill>
+                            <a:srgbClr val="FFFFFF"/>
+                          </a:solidFill>
+                          <a:latin typeface="Arial"/>
+                        </a:defRPr>
+                      </a:pPr>
+                      <a:r>
+                        <a:t>W02</a:t>
+                      </a:r>
+                    </a:p>
+                  </a:txBody>
+                  <a:tcPr>
+                    <a:solidFill>
+                      <a:srgbClr val="0B1F33"/>
+                    </a:solidFill>
+                  </a:tcPr>
+                </a:tc>
+                <a:tc>
+                  <a:txBody>
+                    <a:bodyPr/>
+                    <a:lstStyle/>
+                    <a:p>
+                      <a:pPr algn="ctr">
+                        <a:defRPr sz="800" b="1">
+                          <a:solidFill>
+                            <a:srgbClr val="FFFFFF"/>
+                          </a:solidFill>
+                          <a:latin typeface="Arial"/>
+                        </a:defRPr>
+                      </a:pPr>
+                      <a:r>
+                        <a:t>W03</a:t>
+                      </a:r>
+                    </a:p>
+                  </a:txBody>
+                  <a:tcPr>
+                    <a:solidFill>
+                      <a:srgbClr val="0B1F33"/>
+                    </a:solidFill>
+                  </a:tcPr>
+                </a:tc>
+              </a:tr>
+              <a:tr h="2240280">
+                <a:tc>
+                  <a:txBody>
+                    <a:bodyPr/>
+                    <a:lstStyle/>
+                    <a:p>
+                      <a:pPr algn="ctr">
+                        <a:defRPr sz="800">
+                          <a:solidFill>
+                            <a:srgbClr val="1F2937"/>
+                          </a:solidFill>
+                          <a:latin typeface="Arial"/>
+                        </a:defRPr>
+                      </a:pPr>
+                      <a:r>
+                        <a:t>ADDP_ITEM_01</a:t>
+                      </a:r>
+                    </a:p>
+                  </a:txBody>
+                  <a:tcPr>
+                    <a:solidFill>
+                      <a:srgbClr val="F8FAFC"/>
+                    </a:solidFill>
+                  </a:tcPr>
+                </a:tc>
+                <a:tc>
+                  <a:txBody>
+                    <a:bodyPr/>
+                    <a:lstStyle/>
+                    <a:p>
+                      <a:pPr algn="ctr">
+                        <a:defRPr sz="800">
+                          <a:solidFill>
+                            <a:srgbClr val="1F2937"/>
+                          </a:solidFill>
+                          <a:latin typeface="Arial"/>
+                        </a:defRPr>
+                      </a:pPr>
+                      <a:r>
+                        <a:t>52</a:t>
+                      </a:r>
+                    </a:p>
+                  </a:txBody>
+                  <a:tcPr>
+                    <a:solidFill>
+                      <a:srgbClr val="FEE2E2"/>
+                    </a:solidFill>
+                  </a:tcPr>
+                </a:tc>
+                <a:tc>
+                  <a:txBody>
+                    <a:bodyPr/>
+                    <a:lstStyle/>
+                    <a:p>
+                      <a:pPr algn="ctr">
+                        <a:defRPr sz="800">
+                          <a:solidFill>
+                            <a:srgbClr val="1F2937"/>
+                          </a:solidFill>
+                          <a:latin typeface="Arial"/>
+                        </a:defRPr>
+                      </a:pPr>
+                      <a:r>
+                        <a:t>62</a:t>
+                      </a:r>
+                    </a:p>
+                  </a:txBody>
+                  <a:tcPr>
+                    <a:solidFill>
+                      <a:srgbClr val="FEE2E2"/>
+                    </a:solidFill>
+                  </a:tcPr>
+                </a:tc>
+                <a:tc>
+                  <a:txBody>
+                    <a:bodyPr/>
+                    <a:lstStyle/>
+                    <a:p>
+                      <a:pPr algn="ctr">
+                        <a:defRPr sz="800">
+                          <a:solidFill>
+                            <a:srgbClr val="1F2937"/>
+                          </a:solidFill>
+                          <a:latin typeface="Arial"/>
+                        </a:defRPr>
+                      </a:pPr>
+                      <a:r>
+                        <a:t>72</a:t>
+                      </a:r>
+                    </a:p>
+                  </a:txBody>
+                  <a:tcPr>
+                    <a:solidFill>
+                      <a:srgbClr val="FEE2E2"/>
+                    </a:solidFill>
+                  </a:tcPr>
+                </a:tc>
+              </a:tr>
+            </a:tbl>
+          </a:graphicData>
+        </a:graphic>
+      </p:graphicFrame>
+      <p:sp>
+        <p:nvSpPr>
+          <p:cNvPr id="6" name="Rectangle 5"/>
+          <p:cNvSpPr/>
+          <p:nvPr/>
+        </p:nvSpPr>
+        <p:spPr>
+          <a:xfrm>
+            <a:off x="594360" y="5806440"/>
+            <a:ext cx="228600" cy="164592"/>
+          </a:xfrm>
+          <a:prstGeom prst="rect">
+            <a:avLst/>
+          </a:prstGeom>
+          <a:solidFill>
+            <a:srgbClr val="DCFCE7"/>
+          </a:solidFill>
+          <a:ln>
+            <a:solidFill>
+              <a:srgbClr val="CBD5E1"/>
+            </a:solidFill>
+          </a:ln>
+        </p:spPr>
+        <p:style>
+          <a:lnRef idx="1">
+            <a:schemeClr val="accent1"/>
+          </a:lnRef>
+          <a:fillRef idx="3">
+            <a:schemeClr val="accent1"/>
+          </a:fillRef>
+          <a:effectRef idx="2">
+            <a:schemeClr val="accent1"/>
+          </a:effectRef>
+          <a:fontRef idx="minor">
+            <a:schemeClr val="lt1"/>
+          </a:fontRef>
+        </p:style>
+        <p:txBody>
+          <a:bodyPr rtlCol="0" anchor="ctr"/>
+          <a:lstStyle/>
+          <a:p>
+            <a:pPr algn="ctr"/>
+          </a:p>
+        </p:txBody>
+      </p:sp>
+      <p:sp>
+        <p:nvSpPr>
+          <p:cNvPr id="7" name="TextBox 6"/>
+          <p:cNvSpPr txBox="1"/>
+          <p:nvPr/>
+        </p:nvSpPr>
+        <p:spPr>
+          <a:xfrm>
+            <a:off x="886968" y="5742432"/>
+            <a:ext cx="777240" cy="228600"/>
+          </a:xfrm>
+          <a:prstGeom prst="rect">
+            <a:avLst/>
+          </a:prstGeom>
+          <a:noFill/>
+        </p:spPr>
+        <p:txBody>
+          <a:bodyPr wrap="square">
+            <a:spAutoFit/>
+          </a:bodyPr>
+          <a:lstStyle/>
+          <a:p>
+            <a:pPr>
+              <a:defRPr sz="800" b="0">
+                <a:solidFill>
+                  <a:srgbClr val="6B7280"/>
+                </a:solidFill>
+                <a:latin typeface="Arial"/>
+              </a:defRPr>
+            </a:pPr>
+            <a:r>
+              <a:t>&gt;=95</a:t>
+            </a:r>
+          </a:p>
+        </p:txBody>
+      </p:sp>
+      <p:sp>
+        <p:nvSpPr>
+          <p:cNvPr id="8" name="Rectangle 7"/>
+          <p:cNvSpPr/>
+          <p:nvPr/>
+        </p:nvSpPr>
+        <p:spPr>
+          <a:xfrm>
+            <a:off x="1737360" y="5806440"/>
+            <a:ext cx="228600" cy="164592"/>
+          </a:xfrm>
+          <a:prstGeom prst="rect">
+            <a:avLst/>
+          </a:prstGeom>
+          <a:solidFill>
+            <a:srgbClr val="FEF9C3"/>
+          </a:solidFill>
+          <a:ln>
+            <a:solidFill>
+              <a:srgbClr val="CBD5E1"/>
+            </a:solidFill>
+          </a:ln>
+        </p:spPr>
+        <p:style>
+          <a:lnRef idx="1">
+            <a:schemeClr val="accent1"/>
+          </a:lnRef>
+          <a:fillRef idx="3">
+            <a:schemeClr val="accent1"/>
+          </a:fillRef>
+          <a:effectRef idx="2">
+            <a:schemeClr val="accent1"/>
+          </a:effectRef>
+          <a:fontRef idx="minor">
+            <a:schemeClr val="lt1"/>
+          </a:fontRef>
+        </p:style>
+        <p:txBody>
+          <a:bodyPr rtlCol="0" anchor="ctr"/>
+          <a:lstStyle/>
+          <a:p>
+            <a:pPr algn="ctr"/>
+          </a:p>
+        </p:txBody>
+      </p:sp>
+      <p:sp>
+        <p:nvSpPr>
+          <p:cNvPr id="9" name="TextBox 8"/>
+          <p:cNvSpPr txBox="1"/>
+          <p:nvPr/>
+        </p:nvSpPr>
+        <p:spPr>
+          <a:xfrm>
+            <a:off x="2029968" y="5742432"/>
+            <a:ext cx="777240" cy="228600"/>
+          </a:xfrm>
+          <a:prstGeom prst="rect">
+            <a:avLst/>
+          </a:prstGeom>
+          <a:noFill/>
+        </p:spPr>
+        <p:txBody>
+          <a:bodyPr wrap="square">
+            <a:spAutoFit/>
+          </a:bodyPr>
+          <a:lstStyle/>
+          <a:p>
+            <a:pPr>
+              <a:defRPr sz="800" b="0">
+                <a:solidFill>
+                  <a:srgbClr val="6B7280"/>
+                </a:solidFill>
+                <a:latin typeface="Arial"/>
+              </a:defRPr>
+            </a:pPr>
+            <a:r>
+              <a:t>80-94.9</a:t>
+            </a:r>
+          </a:p>
+        </p:txBody>
+      </p:sp>
+      <p:sp>
+        <p:nvSpPr>
+          <p:cNvPr id="10" name="Rectangle 9"/>
+          <p:cNvSpPr/>
+          <p:nvPr/>
+        </p:nvSpPr>
+        <p:spPr>
+          <a:xfrm>
+            <a:off x="2880360" y="5806440"/>
+            <a:ext cx="228600" cy="164592"/>
+          </a:xfrm>
+          <a:prstGeom prst="rect">
+            <a:avLst/>
+          </a:prstGeom>
+          <a:solidFill>
+            <a:srgbClr val="FEE2E2"/>
+          </a:solidFill>
+          <a:ln>
+            <a:solidFill>
+              <a:srgbClr val="CBD5E1"/>
+            </a:solidFill>
+          </a:ln>
+        </p:spPr>
+        <p:style>
+          <a:lnRef idx="1">
+            <a:schemeClr val="accent1"/>
+          </a:lnRef>
+          <a:fillRef idx="3">
+            <a:schemeClr val="accent1"/>
+          </a:fillRef>
+          <a:effectRef idx="2">
+            <a:schemeClr val="accent1"/>
+          </a:effectRef>
+          <a:fontRef idx="minor">
+            <a:schemeClr val="lt1"/>
+          </a:fontRef>
+        </p:style>
+        <p:txBody>
+          <a:bodyPr rtlCol="0" anchor="ctr"/>
+          <a:lstStyle/>
+          <a:p>
+            <a:pPr algn="ctr"/>
+          </a:p>
+        </p:txBody>
+      </p:sp>
+      <p:sp>
+        <p:nvSpPr>
+          <p:cNvPr id="11" name="TextBox 10"/>
+          <p:cNvSpPr txBox="1"/>
+          <p:nvPr/>
+        </p:nvSpPr>
+        <p:spPr>
+          <a:xfrm>
+            <a:off x="3172968" y="5742432"/>
+            <a:ext cx="777240" cy="228600"/>
+          </a:xfrm>
+          <a:prstGeom prst="rect">
+            <a:avLst/>
+          </a:prstGeom>
+          <a:noFill/>
+        </p:spPr>
+        <p:txBody>
+          <a:bodyPr wrap="square">
+            <a:spAutoFit/>
+          </a:bodyPr>
+          <a:lstStyle/>
+          <a:p>
+            <a:pPr>
+              <a:defRPr sz="800" b="0">
+                <a:solidFill>
+                  <a:srgbClr val="6B7280"/>
+                </a:solidFill>
+                <a:latin typeface="Arial"/>
+              </a:defRPr>
+            </a:pPr>
+            <a:r>
+              <a:t>&lt;80</a:t>
+            </a:r>
+          </a:p>
+        </p:txBody>
+      </p:sp>
+      <p:sp>
+        <p:nvSpPr>
+          <p:cNvPr id="12" name="TextBox 11"/>
+          <p:cNvSpPr txBox="1"/>
+          <p:nvPr/>
+        </p:nvSpPr>
+        <p:spPr>
+          <a:xfrm>
+            <a:off x="411480" y="6446520"/>
+            <a:ext cx="11338560" cy="228600"/>
+          </a:xfrm>
+          <a:prstGeom prst="rect">
+            <a:avLst/>
+          </a:prstGeom>
+          <a:noFill/>
+        </p:spPr>
+        <p:txBody>
+          <a:bodyPr wrap="square">
+            <a:spAutoFit/>
+          </a:bodyPr>
+          <a:lstStyle/>
+          <a:p>
+            <a:pPr>
+              <a:defRPr sz="800" b="0">
+                <a:solidFill>
+                  <a:srgbClr val="6B7280"/>
+                </a:solidFill>
+                <a:latin typeface="Arial"/>
+              </a:defRPr>
+            </a:pPr>
+            <a:r>
+              <a:t>Index 2 example uses per-wafer median values for the same report indexes.</a:t>
+            </a:r>
+          </a:p>
+        </p:txBody>
+      </p:sp>
+    </p:spTree>
+  </p:cSld>
+  <p:clrMapOvr>
+    <a:masterClrMapping/>
+  </p:clrMapOvr>
+</p:sld>
+</file>
+
+<file path=ppt/slides/slide5.xml><?xml version="1.0" encoding="utf-8"?>
 <p:sld xmlns:a="http://schemas.openxmlformats.org/drawingml/2006/main" xmlns:p="http://schemas.openxmlformats.org/presentationml/2006/main" xmlns:r="http://schemas.openxmlformats.org/officeDocument/2006/relationships">
   <p:cSld>
     <p:spTree>

--- a/templates/template_report.pptx
+++ b/templates/template_report.pptx
@@ -10,6 +10,9 @@
     <p:sldId id="258" r:id="rId9"/>
     <p:sldId id="259" r:id="rId10"/>
     <p:sldId id="260" r:id="rId11"/>
+    <p:sldId id="261" r:id="rId12"/>
+    <p:sldId id="262" r:id="rId13"/>
+    <p:sldId id="263" r:id="rId14"/>
   </p:sldIdLst>
   <p:sldSz cx="12191695" cy="6858000" type="screen4x3"/>
   <p:notesSz cx="6858000" cy="9144000"/>
@@ -3246,7 +3249,7 @@
               </a:defRPr>
             </a:pPr>
             <a:r>
-              <a:t>2026-06-18 16:05</a:t>
+              <a:t>2026-06-18 16:17</a:t>
             </a:r>
           </a:p>
         </p:txBody>
@@ -5512,7 +5515,7 @@
               </a:defRPr>
             </a:pPr>
             <a:r>
-              <a:t>Measurement Data Sample</a:t>
+              <a:t>Statistical Table - Index 1</a:t>
             </a:r>
           </a:p>
         </p:txBody>
@@ -5591,7 +5594,7 @@
               </a:defRPr>
             </a:pPr>
             <a:r>
-              <a:t>Rows are trimmed for mail package size control</a:t>
+              <a:t>ADDP_ITEM_01 wafer-level distribution summary</a:t>
             </a:r>
           </a:p>
         </p:txBody>
@@ -5605,8 +5608,8 @@
           <p:nvPr/>
         </p:nvGraphicFramePr>
         <p:xfrm>
-          <a:off x="502920" y="1143000"/>
-          <a:ext cx="11201400" cy="4892040"/>
+          <a:off x="594360" y="1143000"/>
+          <a:ext cx="10972800" cy="4389120"/>
         </p:xfrm>
         <a:graphic>
           <a:graphicData uri="http://schemas.openxmlformats.org/drawingml/2006/table">
@@ -5615,16 +5618,16 @@
                 <a:tableStyleId>{5C22544A-7EE6-4342-B048-85BDC9FD1C3A}</a:tableStyleId>
               </a:tblPr>
               <a:tblGrid>
-                <a:gridCol w="1400175"/>
-                <a:gridCol w="1400175"/>
-                <a:gridCol w="1400175"/>
-                <a:gridCol w="1400175"/>
-                <a:gridCol w="1400175"/>
-                <a:gridCol w="1400175"/>
-                <a:gridCol w="1400175"/>
-                <a:gridCol w="1400175"/>
+                <a:gridCol w="1371600"/>
+                <a:gridCol w="1371600"/>
+                <a:gridCol w="1371600"/>
+                <a:gridCol w="1371600"/>
+                <a:gridCol w="1371600"/>
+                <a:gridCol w="1371600"/>
+                <a:gridCol w="1371600"/>
+                <a:gridCol w="1371600"/>
               </a:tblGrid>
-              <a:tr h="287767">
+              <a:tr h="877824">
                 <a:tc>
                   <a:txBody>
                     <a:bodyPr/>
@@ -5639,7 +5642,7 @@
                         </a:defRPr>
                       </a:pPr>
                       <a:r>
-                        <a:t>fab_lot_id</a:t>
+                        <a:t>Scope</a:t>
                       </a:r>
                     </a:p>
                   </a:txBody>
@@ -5663,7 +5666,7 @@
                         </a:defRPr>
                       </a:pPr>
                       <a:r>
-                        <a:t>wafer_id</a:t>
+                        <a:t>N</a:t>
                       </a:r>
                     </a:p>
                   </a:txBody>
@@ -5687,7 +5690,7 @@
                         </a:defRPr>
                       </a:pPr>
                       <a:r>
-                        <a:t>step_id</a:t>
+                        <a:t>Mean</a:t>
                       </a:r>
                     </a:p>
                   </a:txBody>
@@ -5711,7 +5714,7 @@
                         </a:defRPr>
                       </a:pPr>
                       <a:r>
-                        <a:t>tkout_time</a:t>
+                        <a:t>Std</a:t>
                       </a:r>
                     </a:p>
                   </a:txBody>
@@ -5735,7 +5738,7 @@
                         </a:defRPr>
                       </a:pPr>
                       <a:r>
-                        <a:t>eqp_id</a:t>
+                        <a:t>Median</a:t>
                       </a:r>
                     </a:p>
                   </a:txBody>
@@ -5759,7 +5762,7 @@
                         </a:defRPr>
                       </a:pPr>
                       <a:r>
-                        <a:t>CHIP_X_POS</a:t>
+                        <a:t>Min</a:t>
                       </a:r>
                     </a:p>
                   </a:txBody>
@@ -5783,7 +5786,7 @@
                         </a:defRPr>
                       </a:pPr>
                       <a:r>
-                        <a:t>CHIP_Y_POS</a:t>
+                        <a:t>Max</a:t>
                       </a:r>
                     </a:p>
                   </a:txBody>
@@ -5807,7 +5810,7 @@
                         </a:defRPr>
                       </a:pPr>
                       <a:r>
-                        <a:t>ADDP_ITEM_01</a:t>
+                        <a:t>Pass Rate</a:t>
                       </a:r>
                     </a:p>
                   </a:txBody>
@@ -5818,7 +5821,7 @@
                   </a:tcPr>
                 </a:tc>
               </a:tr>
-              <a:tr h="287767">
+              <a:tr h="877824">
                 <a:tc>
                   <a:txBody>
                     <a:bodyPr/>
@@ -5833,7 +5836,7 @@
                         </a:defRPr>
                       </a:pPr>
                       <a:r>
-                        <a:t>LOT001</a:t>
+                        <a:t>Overall</a:t>
                       </a:r>
                     </a:p>
                   </a:txBody>
@@ -5857,7 +5860,7 @@
                         </a:defRPr>
                       </a:pPr>
                       <a:r>
-                        <a:t>1</a:t>
+                        <a:t>27</a:t>
                       </a:r>
                     </a:p>
                   </a:txBody>
@@ -5881,7 +5884,7 @@
                         </a:defRPr>
                       </a:pPr>
                       <a:r>
-                        <a:t>STEP001</a:t>
+                        <a:t>62</a:t>
                       </a:r>
                     </a:p>
                   </a:txBody>
@@ -5905,7 +5908,7 @@
                         </a:defRPr>
                       </a:pPr>
                       <a:r>
-                        <a:t>2026-01-01 00:00:00</a:t>
+                        <a:t>8.19</a:t>
                       </a:r>
                     </a:p>
                   </a:txBody>
@@ -5929,443 +5932,7 @@
                         </a:defRPr>
                       </a:pPr>
                       <a:r>
-                        <a:t>EQP_01</a:t>
-                      </a:r>
-                    </a:p>
-                  </a:txBody>
-                  <a:tcPr>
-                    <a:solidFill>
-                      <a:srgbClr val="F8FAFC"/>
-                    </a:solidFill>
-                  </a:tcPr>
-                </a:tc>
-                <a:tc>
-                  <a:txBody>
-                    <a:bodyPr/>
-                    <a:lstStyle/>
-                    <a:p>
-                      <a:pPr algn="ctr">
-                        <a:defRPr sz="800">
-                          <a:solidFill>
-                            <a:srgbClr val="1F2937"/>
-                          </a:solidFill>
-                          <a:latin typeface="Arial"/>
-                        </a:defRPr>
-                      </a:pPr>
-                      <a:r>
-                        <a:t>-1</a:t>
-                      </a:r>
-                    </a:p>
-                  </a:txBody>
-                  <a:tcPr>
-                    <a:solidFill>
-                      <a:srgbClr val="F8FAFC"/>
-                    </a:solidFill>
-                  </a:tcPr>
-                </a:tc>
-                <a:tc>
-                  <a:txBody>
-                    <a:bodyPr/>
-                    <a:lstStyle/>
-                    <a:p>
-                      <a:pPr algn="ctr">
-                        <a:defRPr sz="800">
-                          <a:solidFill>
-                            <a:srgbClr val="1F2937"/>
-                          </a:solidFill>
-                          <a:latin typeface="Arial"/>
-                        </a:defRPr>
-                      </a:pPr>
-                      <a:r>
-                        <a:t>-1</a:t>
-                      </a:r>
-                    </a:p>
-                  </a:txBody>
-                  <a:tcPr>
-                    <a:solidFill>
-                      <a:srgbClr val="F8FAFC"/>
-                    </a:solidFill>
-                  </a:tcPr>
-                </a:tc>
-                <a:tc>
-                  <a:txBody>
-                    <a:bodyPr/>
-                    <a:lstStyle/>
-                    <a:p>
-                      <a:pPr algn="ctr">
-                        <a:defRPr sz="800">
-                          <a:solidFill>
-                            <a:srgbClr val="1F2937"/>
-                          </a:solidFill>
-                          <a:latin typeface="Arial"/>
-                        </a:defRPr>
-                      </a:pPr>
-                      <a:r>
-                        <a:t>52</a:t>
-                      </a:r>
-                    </a:p>
-                  </a:txBody>
-                  <a:tcPr>
-                    <a:solidFill>
-                      <a:srgbClr val="F8FAFC"/>
-                    </a:solidFill>
-                  </a:tcPr>
-                </a:tc>
-              </a:tr>
-              <a:tr h="287767">
-                <a:tc>
-                  <a:txBody>
-                    <a:bodyPr/>
-                    <a:lstStyle/>
-                    <a:p>
-                      <a:pPr algn="ctr">
-                        <a:defRPr sz="800">
-                          <a:solidFill>
-                            <a:srgbClr val="1F2937"/>
-                          </a:solidFill>
-                          <a:latin typeface="Arial"/>
-                        </a:defRPr>
-                      </a:pPr>
-                      <a:r>
-                        <a:t>LOT001</a:t>
-                      </a:r>
-                    </a:p>
-                  </a:txBody>
-                  <a:tcPr>
-                    <a:solidFill>
-                      <a:srgbClr val="FFFFFF"/>
-                    </a:solidFill>
-                  </a:tcPr>
-                </a:tc>
-                <a:tc>
-                  <a:txBody>
-                    <a:bodyPr/>
-                    <a:lstStyle/>
-                    <a:p>
-                      <a:pPr algn="ctr">
-                        <a:defRPr sz="800">
-                          <a:solidFill>
-                            <a:srgbClr val="1F2937"/>
-                          </a:solidFill>
-                          <a:latin typeface="Arial"/>
-                        </a:defRPr>
-                      </a:pPr>
-                      <a:r>
-                        <a:t>1</a:t>
-                      </a:r>
-                    </a:p>
-                  </a:txBody>
-                  <a:tcPr>
-                    <a:solidFill>
-                      <a:srgbClr val="FFFFFF"/>
-                    </a:solidFill>
-                  </a:tcPr>
-                </a:tc>
-                <a:tc>
-                  <a:txBody>
-                    <a:bodyPr/>
-                    <a:lstStyle/>
-                    <a:p>
-                      <a:pPr algn="ctr">
-                        <a:defRPr sz="800">
-                          <a:solidFill>
-                            <a:srgbClr val="1F2937"/>
-                          </a:solidFill>
-                          <a:latin typeface="Arial"/>
-                        </a:defRPr>
-                      </a:pPr>
-                      <a:r>
-                        <a:t>STEP001</a:t>
-                      </a:r>
-                    </a:p>
-                  </a:txBody>
-                  <a:tcPr>
-                    <a:solidFill>
-                      <a:srgbClr val="FFFFFF"/>
-                    </a:solidFill>
-                  </a:tcPr>
-                </a:tc>
-                <a:tc>
-                  <a:txBody>
-                    <a:bodyPr/>
-                    <a:lstStyle/>
-                    <a:p>
-                      <a:pPr algn="ctr">
-                        <a:defRPr sz="800">
-                          <a:solidFill>
-                            <a:srgbClr val="1F2937"/>
-                          </a:solidFill>
-                          <a:latin typeface="Arial"/>
-                        </a:defRPr>
-                      </a:pPr>
-                      <a:r>
-                        <a:t>2026-01-01 00:00:00</a:t>
-                      </a:r>
-                    </a:p>
-                  </a:txBody>
-                  <a:tcPr>
-                    <a:solidFill>
-                      <a:srgbClr val="FFFFFF"/>
-                    </a:solidFill>
-                  </a:tcPr>
-                </a:tc>
-                <a:tc>
-                  <a:txBody>
-                    <a:bodyPr/>
-                    <a:lstStyle/>
-                    <a:p>
-                      <a:pPr algn="ctr">
-                        <a:defRPr sz="800">
-                          <a:solidFill>
-                            <a:srgbClr val="1F2937"/>
-                          </a:solidFill>
-                          <a:latin typeface="Arial"/>
-                        </a:defRPr>
-                      </a:pPr>
-                      <a:r>
-                        <a:t>EQP_01</a:t>
-                      </a:r>
-                    </a:p>
-                  </a:txBody>
-                  <a:tcPr>
-                    <a:solidFill>
-                      <a:srgbClr val="FFFFFF"/>
-                    </a:solidFill>
-                  </a:tcPr>
-                </a:tc>
-                <a:tc>
-                  <a:txBody>
-                    <a:bodyPr/>
-                    <a:lstStyle/>
-                    <a:p>
-                      <a:pPr algn="ctr">
-                        <a:defRPr sz="800">
-                          <a:solidFill>
-                            <a:srgbClr val="1F2937"/>
-                          </a:solidFill>
-                          <a:latin typeface="Arial"/>
-                        </a:defRPr>
-                      </a:pPr>
-                      <a:r>
-                        <a:t>-1</a:t>
-                      </a:r>
-                    </a:p>
-                  </a:txBody>
-                  <a:tcPr>
-                    <a:solidFill>
-                      <a:srgbClr val="FFFFFF"/>
-                    </a:solidFill>
-                  </a:tcPr>
-                </a:tc>
-                <a:tc>
-                  <a:txBody>
-                    <a:bodyPr/>
-                    <a:lstStyle/>
-                    <a:p>
-                      <a:pPr algn="ctr">
-                        <a:defRPr sz="800">
-                          <a:solidFill>
-                            <a:srgbClr val="1F2937"/>
-                          </a:solidFill>
-                          <a:latin typeface="Arial"/>
-                        </a:defRPr>
-                      </a:pPr>
-                      <a:r>
-                        <a:t>0</a:t>
-                      </a:r>
-                    </a:p>
-                  </a:txBody>
-                  <a:tcPr>
-                    <a:solidFill>
-                      <a:srgbClr val="FFFFFF"/>
-                    </a:solidFill>
-                  </a:tcPr>
-                </a:tc>
-                <a:tc>
-                  <a:txBody>
-                    <a:bodyPr/>
-                    <a:lstStyle/>
-                    <a:p>
-                      <a:pPr algn="ctr">
-                        <a:defRPr sz="800">
-                          <a:solidFill>
-                            <a:srgbClr val="1F2937"/>
-                          </a:solidFill>
-                          <a:latin typeface="Arial"/>
-                        </a:defRPr>
-                      </a:pPr>
-                      <a:r>
-                        <a:t>51.5</a:t>
-                      </a:r>
-                    </a:p>
-                  </a:txBody>
-                  <a:tcPr>
-                    <a:solidFill>
-                      <a:srgbClr val="FFFFFF"/>
-                    </a:solidFill>
-                  </a:tcPr>
-                </a:tc>
-              </a:tr>
-              <a:tr h="287767">
-                <a:tc>
-                  <a:txBody>
-                    <a:bodyPr/>
-                    <a:lstStyle/>
-                    <a:p>
-                      <a:pPr algn="ctr">
-                        <a:defRPr sz="800">
-                          <a:solidFill>
-                            <a:srgbClr val="1F2937"/>
-                          </a:solidFill>
-                          <a:latin typeface="Arial"/>
-                        </a:defRPr>
-                      </a:pPr>
-                      <a:r>
-                        <a:t>LOT001</a:t>
-                      </a:r>
-                    </a:p>
-                  </a:txBody>
-                  <a:tcPr>
-                    <a:solidFill>
-                      <a:srgbClr val="F8FAFC"/>
-                    </a:solidFill>
-                  </a:tcPr>
-                </a:tc>
-                <a:tc>
-                  <a:txBody>
-                    <a:bodyPr/>
-                    <a:lstStyle/>
-                    <a:p>
-                      <a:pPr algn="ctr">
-                        <a:defRPr sz="800">
-                          <a:solidFill>
-                            <a:srgbClr val="1F2937"/>
-                          </a:solidFill>
-                          <a:latin typeface="Arial"/>
-                        </a:defRPr>
-                      </a:pPr>
-                      <a:r>
-                        <a:t>1</a:t>
-                      </a:r>
-                    </a:p>
-                  </a:txBody>
-                  <a:tcPr>
-                    <a:solidFill>
-                      <a:srgbClr val="F8FAFC"/>
-                    </a:solidFill>
-                  </a:tcPr>
-                </a:tc>
-                <a:tc>
-                  <a:txBody>
-                    <a:bodyPr/>
-                    <a:lstStyle/>
-                    <a:p>
-                      <a:pPr algn="ctr">
-                        <a:defRPr sz="800">
-                          <a:solidFill>
-                            <a:srgbClr val="1F2937"/>
-                          </a:solidFill>
-                          <a:latin typeface="Arial"/>
-                        </a:defRPr>
-                      </a:pPr>
-                      <a:r>
-                        <a:t>STEP001</a:t>
-                      </a:r>
-                    </a:p>
-                  </a:txBody>
-                  <a:tcPr>
-                    <a:solidFill>
-                      <a:srgbClr val="F8FAFC"/>
-                    </a:solidFill>
-                  </a:tcPr>
-                </a:tc>
-                <a:tc>
-                  <a:txBody>
-                    <a:bodyPr/>
-                    <a:lstStyle/>
-                    <a:p>
-                      <a:pPr algn="ctr">
-                        <a:defRPr sz="800">
-                          <a:solidFill>
-                            <a:srgbClr val="1F2937"/>
-                          </a:solidFill>
-                          <a:latin typeface="Arial"/>
-                        </a:defRPr>
-                      </a:pPr>
-                      <a:r>
-                        <a:t>2026-01-01 00:00:00</a:t>
-                      </a:r>
-                    </a:p>
-                  </a:txBody>
-                  <a:tcPr>
-                    <a:solidFill>
-                      <a:srgbClr val="F8FAFC"/>
-                    </a:solidFill>
-                  </a:tcPr>
-                </a:tc>
-                <a:tc>
-                  <a:txBody>
-                    <a:bodyPr/>
-                    <a:lstStyle/>
-                    <a:p>
-                      <a:pPr algn="ctr">
-                        <a:defRPr sz="800">
-                          <a:solidFill>
-                            <a:srgbClr val="1F2937"/>
-                          </a:solidFill>
-                          <a:latin typeface="Arial"/>
-                        </a:defRPr>
-                      </a:pPr>
-                      <a:r>
-                        <a:t>EQP_01</a:t>
-                      </a:r>
-                    </a:p>
-                  </a:txBody>
-                  <a:tcPr>
-                    <a:solidFill>
-                      <a:srgbClr val="F8FAFC"/>
-                    </a:solidFill>
-                  </a:tcPr>
-                </a:tc>
-                <a:tc>
-                  <a:txBody>
-                    <a:bodyPr/>
-                    <a:lstStyle/>
-                    <a:p>
-                      <a:pPr algn="ctr">
-                        <a:defRPr sz="800">
-                          <a:solidFill>
-                            <a:srgbClr val="1F2937"/>
-                          </a:solidFill>
-                          <a:latin typeface="Arial"/>
-                        </a:defRPr>
-                      </a:pPr>
-                      <a:r>
-                        <a:t>-1</a:t>
-                      </a:r>
-                    </a:p>
-                  </a:txBody>
-                  <a:tcPr>
-                    <a:solidFill>
-                      <a:srgbClr val="F8FAFC"/>
-                    </a:solidFill>
-                  </a:tcPr>
-                </a:tc>
-                <a:tc>
-                  <a:txBody>
-                    <a:bodyPr/>
-                    <a:lstStyle/>
-                    <a:p>
-                      <a:pPr algn="ctr">
-                        <a:defRPr sz="800">
-                          <a:solidFill>
-                            <a:srgbClr val="1F2937"/>
-                          </a:solidFill>
-                          <a:latin typeface="Arial"/>
-                        </a:defRPr>
-                      </a:pPr>
-                      <a:r>
-                        <a:t>1</a:t>
+                        <a:t>62</a:t>
                       </a:r>
                     </a:p>
                   </a:txBody>
@@ -6399,8 +5966,6 @@
                     </a:solidFill>
                   </a:tcPr>
                 </a:tc>
-              </a:tr>
-              <a:tr h="287767">
                 <a:tc>
                   <a:txBody>
                     <a:bodyPr/>
@@ -6415,7 +5980,57 @@
                         </a:defRPr>
                       </a:pPr>
                       <a:r>
-                        <a:t>LOT001</a:t>
+                        <a:t>73</a:t>
+                      </a:r>
+                    </a:p>
+                  </a:txBody>
+                  <a:tcPr>
+                    <a:solidFill>
+                      <a:srgbClr val="F8FAFC"/>
+                    </a:solidFill>
+                  </a:tcPr>
+                </a:tc>
+                <a:tc>
+                  <a:txBody>
+                    <a:bodyPr/>
+                    <a:lstStyle/>
+                    <a:p>
+                      <a:pPr algn="ctr">
+                        <a:defRPr sz="800">
+                          <a:solidFill>
+                            <a:srgbClr val="1F2937"/>
+                          </a:solidFill>
+                          <a:latin typeface="Arial"/>
+                        </a:defRPr>
+                      </a:pPr>
+                      <a:r>
+                        <a:t>100</a:t>
+                      </a:r>
+                    </a:p>
+                  </a:txBody>
+                  <a:tcPr>
+                    <a:solidFill>
+                      <a:srgbClr val="F8FAFC"/>
+                    </a:solidFill>
+                  </a:tcPr>
+                </a:tc>
+              </a:tr>
+              <a:tr h="877824">
+                <a:tc>
+                  <a:txBody>
+                    <a:bodyPr/>
+                    <a:lstStyle/>
+                    <a:p>
+                      <a:pPr algn="ctr">
+                        <a:defRPr sz="800">
+                          <a:solidFill>
+                            <a:srgbClr val="1F2937"/>
+                          </a:solidFill>
+                          <a:latin typeface="Arial"/>
+                        </a:defRPr>
+                      </a:pPr>
+                      <a:r>
+                        <a:t>W01</a:t>
                       </a:r>
                     </a:p>
                   </a:txBody>
@@ -6439,7 +6054,7 @@
                         </a:defRPr>
                       </a:pPr>
                       <a:r>
-                        <a:t>1</a:t>
+                        <a:t>9</a:t>
                       </a:r>
                     </a:p>
                   </a:txBody>
@@ -6463,7 +6078,7 @@
                         </a:defRPr>
                       </a:pPr>
                       <a:r>
-                        <a:t>STEP001</a:t>
+                        <a:t>52</a:t>
                       </a:r>
                     </a:p>
                   </a:txBody>
@@ -6487,7 +6102,7 @@
                         </a:defRPr>
                       </a:pPr>
                       <a:r>
-                        <a:t>2026-01-01 00:00:00</a:t>
+                        <a:t>0.577</a:t>
                       </a:r>
                     </a:p>
                   </a:txBody>
@@ -6511,7 +6126,7 @@
                         </a:defRPr>
                       </a:pPr>
                       <a:r>
-                        <a:t>EQP_01</a:t>
+                        <a:t>52</a:t>
                       </a:r>
                     </a:p>
                   </a:txBody>
@@ -6535,7 +6150,7 @@
                         </a:defRPr>
                       </a:pPr>
                       <a:r>
-                        <a:t>0</a:t>
+                        <a:t>51</a:t>
                       </a:r>
                     </a:p>
                   </a:txBody>
@@ -6559,7 +6174,7 @@
                         </a:defRPr>
                       </a:pPr>
                       <a:r>
-                        <a:t>-1</a:t>
+                        <a:t>53</a:t>
                       </a:r>
                     </a:p>
                   </a:txBody>
@@ -6583,7 +6198,7 @@
                         </a:defRPr>
                       </a:pPr>
                       <a:r>
-                        <a:t>52.5</a:t>
+                        <a:t>100</a:t>
                       </a:r>
                     </a:p>
                   </a:txBody>
@@ -6594,7 +6209,7 @@
                   </a:tcPr>
                 </a:tc>
               </a:tr>
-              <a:tr h="287767">
+              <a:tr h="877824">
                 <a:tc>
                   <a:txBody>
                     <a:bodyPr/>
@@ -6609,7 +6224,7 @@
                         </a:defRPr>
                       </a:pPr>
                       <a:r>
-                        <a:t>LOT001</a:t>
+                        <a:t>W02</a:t>
                       </a:r>
                     </a:p>
                   </a:txBody>
@@ -6633,7 +6248,7 @@
                         </a:defRPr>
                       </a:pPr>
                       <a:r>
-                        <a:t>1</a:t>
+                        <a:t>9</a:t>
                       </a:r>
                     </a:p>
                   </a:txBody>
@@ -6657,7 +6272,7 @@
                         </a:defRPr>
                       </a:pPr>
                       <a:r>
-                        <a:t>STEP001</a:t>
+                        <a:t>62</a:t>
                       </a:r>
                     </a:p>
                   </a:txBody>
@@ -6681,7 +6296,7 @@
                         </a:defRPr>
                       </a:pPr>
                       <a:r>
-                        <a:t>2026-01-01 00:00:00</a:t>
+                        <a:t>0.577</a:t>
                       </a:r>
                     </a:p>
                   </a:txBody>
@@ -6705,7 +6320,7 @@
                         </a:defRPr>
                       </a:pPr>
                       <a:r>
-                        <a:t>EQP_01</a:t>
+                        <a:t>62</a:t>
                       </a:r>
                     </a:p>
                   </a:txBody>
@@ -6729,7 +6344,7 @@
                         </a:defRPr>
                       </a:pPr>
                       <a:r>
-                        <a:t>0</a:t>
+                        <a:t>61</a:t>
                       </a:r>
                     </a:p>
                   </a:txBody>
@@ -6753,7 +6368,7 @@
                         </a:defRPr>
                       </a:pPr>
                       <a:r>
-                        <a:t>0</a:t>
+                        <a:t>63</a:t>
                       </a:r>
                     </a:p>
                   </a:txBody>
@@ -6777,7 +6392,7 @@
                         </a:defRPr>
                       </a:pPr>
                       <a:r>
-                        <a:t>52</a:t>
+                        <a:t>100</a:t>
                       </a:r>
                     </a:p>
                   </a:txBody>
@@ -6788,7 +6403,7 @@
                   </a:tcPr>
                 </a:tc>
               </a:tr>
-              <a:tr h="287767">
+              <a:tr h="877824">
                 <a:tc>
                   <a:txBody>
                     <a:bodyPr/>
@@ -6803,7 +6418,7 @@
                         </a:defRPr>
                       </a:pPr>
                       <a:r>
-                        <a:t>LOT001</a:t>
+                        <a:t>W03</a:t>
                       </a:r>
                     </a:p>
                   </a:txBody>
@@ -6827,7 +6442,7 @@
                         </a:defRPr>
                       </a:pPr>
                       <a:r>
-                        <a:t>1</a:t>
+                        <a:t>9</a:t>
                       </a:r>
                     </a:p>
                   </a:txBody>
@@ -6851,7 +6466,7 @@
                         </a:defRPr>
                       </a:pPr>
                       <a:r>
-                        <a:t>STEP001</a:t>
+                        <a:t>72</a:t>
                       </a:r>
                     </a:p>
                   </a:txBody>
@@ -6875,7 +6490,7 @@
                         </a:defRPr>
                       </a:pPr>
                       <a:r>
-                        <a:t>2026-01-01 00:00:00</a:t>
+                        <a:t>0.577</a:t>
                       </a:r>
                     </a:p>
                   </a:txBody>
@@ -6899,7 +6514,7 @@
                         </a:defRPr>
                       </a:pPr>
                       <a:r>
-                        <a:t>EQP_01</a:t>
+                        <a:t>72</a:t>
                       </a:r>
                     </a:p>
                   </a:txBody>
@@ -6923,7 +6538,7 @@
                         </a:defRPr>
                       </a:pPr>
                       <a:r>
-                        <a:t>0</a:t>
+                        <a:t>71</a:t>
                       </a:r>
                     </a:p>
                   </a:txBody>
@@ -6947,7 +6562,7 @@
                         </a:defRPr>
                       </a:pPr>
                       <a:r>
-                        <a:t>1</a:t>
+                        <a:t>73</a:t>
                       </a:r>
                     </a:p>
                   </a:txBody>
@@ -6971,1947 +6586,7 @@
                         </a:defRPr>
                       </a:pPr>
                       <a:r>
-                        <a:t>51.5</a:t>
-                      </a:r>
-                    </a:p>
-                  </a:txBody>
-                  <a:tcPr>
-                    <a:solidFill>
-                      <a:srgbClr val="FFFFFF"/>
-                    </a:solidFill>
-                  </a:tcPr>
-                </a:tc>
-              </a:tr>
-              <a:tr h="287767">
-                <a:tc>
-                  <a:txBody>
-                    <a:bodyPr/>
-                    <a:lstStyle/>
-                    <a:p>
-                      <a:pPr algn="ctr">
-                        <a:defRPr sz="800">
-                          <a:solidFill>
-                            <a:srgbClr val="1F2937"/>
-                          </a:solidFill>
-                          <a:latin typeface="Arial"/>
-                        </a:defRPr>
-                      </a:pPr>
-                      <a:r>
-                        <a:t>LOT001</a:t>
-                      </a:r>
-                    </a:p>
-                  </a:txBody>
-                  <a:tcPr>
-                    <a:solidFill>
-                      <a:srgbClr val="F8FAFC"/>
-                    </a:solidFill>
-                  </a:tcPr>
-                </a:tc>
-                <a:tc>
-                  <a:txBody>
-                    <a:bodyPr/>
-                    <a:lstStyle/>
-                    <a:p>
-                      <a:pPr algn="ctr">
-                        <a:defRPr sz="800">
-                          <a:solidFill>
-                            <a:srgbClr val="1F2937"/>
-                          </a:solidFill>
-                          <a:latin typeface="Arial"/>
-                        </a:defRPr>
-                      </a:pPr>
-                      <a:r>
-                        <a:t>1</a:t>
-                      </a:r>
-                    </a:p>
-                  </a:txBody>
-                  <a:tcPr>
-                    <a:solidFill>
-                      <a:srgbClr val="F8FAFC"/>
-                    </a:solidFill>
-                  </a:tcPr>
-                </a:tc>
-                <a:tc>
-                  <a:txBody>
-                    <a:bodyPr/>
-                    <a:lstStyle/>
-                    <a:p>
-                      <a:pPr algn="ctr">
-                        <a:defRPr sz="800">
-                          <a:solidFill>
-                            <a:srgbClr val="1F2937"/>
-                          </a:solidFill>
-                          <a:latin typeface="Arial"/>
-                        </a:defRPr>
-                      </a:pPr>
-                      <a:r>
-                        <a:t>STEP001</a:t>
-                      </a:r>
-                    </a:p>
-                  </a:txBody>
-                  <a:tcPr>
-                    <a:solidFill>
-                      <a:srgbClr val="F8FAFC"/>
-                    </a:solidFill>
-                  </a:tcPr>
-                </a:tc>
-                <a:tc>
-                  <a:txBody>
-                    <a:bodyPr/>
-                    <a:lstStyle/>
-                    <a:p>
-                      <a:pPr algn="ctr">
-                        <a:defRPr sz="800">
-                          <a:solidFill>
-                            <a:srgbClr val="1F2937"/>
-                          </a:solidFill>
-                          <a:latin typeface="Arial"/>
-                        </a:defRPr>
-                      </a:pPr>
-                      <a:r>
-                        <a:t>2026-01-01 00:00:00</a:t>
-                      </a:r>
-                    </a:p>
-                  </a:txBody>
-                  <a:tcPr>
-                    <a:solidFill>
-                      <a:srgbClr val="F8FAFC"/>
-                    </a:solidFill>
-                  </a:tcPr>
-                </a:tc>
-                <a:tc>
-                  <a:txBody>
-                    <a:bodyPr/>
-                    <a:lstStyle/>
-                    <a:p>
-                      <a:pPr algn="ctr">
-                        <a:defRPr sz="800">
-                          <a:solidFill>
-                            <a:srgbClr val="1F2937"/>
-                          </a:solidFill>
-                          <a:latin typeface="Arial"/>
-                        </a:defRPr>
-                      </a:pPr>
-                      <a:r>
-                        <a:t>EQP_01</a:t>
-                      </a:r>
-                    </a:p>
-                  </a:txBody>
-                  <a:tcPr>
-                    <a:solidFill>
-                      <a:srgbClr val="F8FAFC"/>
-                    </a:solidFill>
-                  </a:tcPr>
-                </a:tc>
-                <a:tc>
-                  <a:txBody>
-                    <a:bodyPr/>
-                    <a:lstStyle/>
-                    <a:p>
-                      <a:pPr algn="ctr">
-                        <a:defRPr sz="800">
-                          <a:solidFill>
-                            <a:srgbClr val="1F2937"/>
-                          </a:solidFill>
-                          <a:latin typeface="Arial"/>
-                        </a:defRPr>
-                      </a:pPr>
-                      <a:r>
-                        <a:t>1</a:t>
-                      </a:r>
-                    </a:p>
-                  </a:txBody>
-                  <a:tcPr>
-                    <a:solidFill>
-                      <a:srgbClr val="F8FAFC"/>
-                    </a:solidFill>
-                  </a:tcPr>
-                </a:tc>
-                <a:tc>
-                  <a:txBody>
-                    <a:bodyPr/>
-                    <a:lstStyle/>
-                    <a:p>
-                      <a:pPr algn="ctr">
-                        <a:defRPr sz="800">
-                          <a:solidFill>
-                            <a:srgbClr val="1F2937"/>
-                          </a:solidFill>
-                          <a:latin typeface="Arial"/>
-                        </a:defRPr>
-                      </a:pPr>
-                      <a:r>
-                        <a:t>-1</a:t>
-                      </a:r>
-                    </a:p>
-                  </a:txBody>
-                  <a:tcPr>
-                    <a:solidFill>
-                      <a:srgbClr val="F8FAFC"/>
-                    </a:solidFill>
-                  </a:tcPr>
-                </a:tc>
-                <a:tc>
-                  <a:txBody>
-                    <a:bodyPr/>
-                    <a:lstStyle/>
-                    <a:p>
-                      <a:pPr algn="ctr">
-                        <a:defRPr sz="800">
-                          <a:solidFill>
-                            <a:srgbClr val="1F2937"/>
-                          </a:solidFill>
-                          <a:latin typeface="Arial"/>
-                        </a:defRPr>
-                      </a:pPr>
-                      <a:r>
-                        <a:t>53</a:t>
-                      </a:r>
-                    </a:p>
-                  </a:txBody>
-                  <a:tcPr>
-                    <a:solidFill>
-                      <a:srgbClr val="F8FAFC"/>
-                    </a:solidFill>
-                  </a:tcPr>
-                </a:tc>
-              </a:tr>
-              <a:tr h="287767">
-                <a:tc>
-                  <a:txBody>
-                    <a:bodyPr/>
-                    <a:lstStyle/>
-                    <a:p>
-                      <a:pPr algn="ctr">
-                        <a:defRPr sz="800">
-                          <a:solidFill>
-                            <a:srgbClr val="1F2937"/>
-                          </a:solidFill>
-                          <a:latin typeface="Arial"/>
-                        </a:defRPr>
-                      </a:pPr>
-                      <a:r>
-                        <a:t>LOT001</a:t>
-                      </a:r>
-                    </a:p>
-                  </a:txBody>
-                  <a:tcPr>
-                    <a:solidFill>
-                      <a:srgbClr val="FFFFFF"/>
-                    </a:solidFill>
-                  </a:tcPr>
-                </a:tc>
-                <a:tc>
-                  <a:txBody>
-                    <a:bodyPr/>
-                    <a:lstStyle/>
-                    <a:p>
-                      <a:pPr algn="ctr">
-                        <a:defRPr sz="800">
-                          <a:solidFill>
-                            <a:srgbClr val="1F2937"/>
-                          </a:solidFill>
-                          <a:latin typeface="Arial"/>
-                        </a:defRPr>
-                      </a:pPr>
-                      <a:r>
-                        <a:t>1</a:t>
-                      </a:r>
-                    </a:p>
-                  </a:txBody>
-                  <a:tcPr>
-                    <a:solidFill>
-                      <a:srgbClr val="FFFFFF"/>
-                    </a:solidFill>
-                  </a:tcPr>
-                </a:tc>
-                <a:tc>
-                  <a:txBody>
-                    <a:bodyPr/>
-                    <a:lstStyle/>
-                    <a:p>
-                      <a:pPr algn="ctr">
-                        <a:defRPr sz="800">
-                          <a:solidFill>
-                            <a:srgbClr val="1F2937"/>
-                          </a:solidFill>
-                          <a:latin typeface="Arial"/>
-                        </a:defRPr>
-                      </a:pPr>
-                      <a:r>
-                        <a:t>STEP001</a:t>
-                      </a:r>
-                    </a:p>
-                  </a:txBody>
-                  <a:tcPr>
-                    <a:solidFill>
-                      <a:srgbClr val="FFFFFF"/>
-                    </a:solidFill>
-                  </a:tcPr>
-                </a:tc>
-                <a:tc>
-                  <a:txBody>
-                    <a:bodyPr/>
-                    <a:lstStyle/>
-                    <a:p>
-                      <a:pPr algn="ctr">
-                        <a:defRPr sz="800">
-                          <a:solidFill>
-                            <a:srgbClr val="1F2937"/>
-                          </a:solidFill>
-                          <a:latin typeface="Arial"/>
-                        </a:defRPr>
-                      </a:pPr>
-                      <a:r>
-                        <a:t>2026-01-01 00:00:00</a:t>
-                      </a:r>
-                    </a:p>
-                  </a:txBody>
-                  <a:tcPr>
-                    <a:solidFill>
-                      <a:srgbClr val="FFFFFF"/>
-                    </a:solidFill>
-                  </a:tcPr>
-                </a:tc>
-                <a:tc>
-                  <a:txBody>
-                    <a:bodyPr/>
-                    <a:lstStyle/>
-                    <a:p>
-                      <a:pPr algn="ctr">
-                        <a:defRPr sz="800">
-                          <a:solidFill>
-                            <a:srgbClr val="1F2937"/>
-                          </a:solidFill>
-                          <a:latin typeface="Arial"/>
-                        </a:defRPr>
-                      </a:pPr>
-                      <a:r>
-                        <a:t>EQP_01</a:t>
-                      </a:r>
-                    </a:p>
-                  </a:txBody>
-                  <a:tcPr>
-                    <a:solidFill>
-                      <a:srgbClr val="FFFFFF"/>
-                    </a:solidFill>
-                  </a:tcPr>
-                </a:tc>
-                <a:tc>
-                  <a:txBody>
-                    <a:bodyPr/>
-                    <a:lstStyle/>
-                    <a:p>
-                      <a:pPr algn="ctr">
-                        <a:defRPr sz="800">
-                          <a:solidFill>
-                            <a:srgbClr val="1F2937"/>
-                          </a:solidFill>
-                          <a:latin typeface="Arial"/>
-                        </a:defRPr>
-                      </a:pPr>
-                      <a:r>
-                        <a:t>1</a:t>
-                      </a:r>
-                    </a:p>
-                  </a:txBody>
-                  <a:tcPr>
-                    <a:solidFill>
-                      <a:srgbClr val="FFFFFF"/>
-                    </a:solidFill>
-                  </a:tcPr>
-                </a:tc>
-                <a:tc>
-                  <a:txBody>
-                    <a:bodyPr/>
-                    <a:lstStyle/>
-                    <a:p>
-                      <a:pPr algn="ctr">
-                        <a:defRPr sz="800">
-                          <a:solidFill>
-                            <a:srgbClr val="1F2937"/>
-                          </a:solidFill>
-                          <a:latin typeface="Arial"/>
-                        </a:defRPr>
-                      </a:pPr>
-                      <a:r>
-                        <a:t>0</a:t>
-                      </a:r>
-                    </a:p>
-                  </a:txBody>
-                  <a:tcPr>
-                    <a:solidFill>
-                      <a:srgbClr val="FFFFFF"/>
-                    </a:solidFill>
-                  </a:tcPr>
-                </a:tc>
-                <a:tc>
-                  <a:txBody>
-                    <a:bodyPr/>
-                    <a:lstStyle/>
-                    <a:p>
-                      <a:pPr algn="ctr">
-                        <a:defRPr sz="800">
-                          <a:solidFill>
-                            <a:srgbClr val="1F2937"/>
-                          </a:solidFill>
-                          <a:latin typeface="Arial"/>
-                        </a:defRPr>
-                      </a:pPr>
-                      <a:r>
-                        <a:t>52.5</a:t>
-                      </a:r>
-                    </a:p>
-                  </a:txBody>
-                  <a:tcPr>
-                    <a:solidFill>
-                      <a:srgbClr val="FFFFFF"/>
-                    </a:solidFill>
-                  </a:tcPr>
-                </a:tc>
-              </a:tr>
-              <a:tr h="287767">
-                <a:tc>
-                  <a:txBody>
-                    <a:bodyPr/>
-                    <a:lstStyle/>
-                    <a:p>
-                      <a:pPr algn="ctr">
-                        <a:defRPr sz="800">
-                          <a:solidFill>
-                            <a:srgbClr val="1F2937"/>
-                          </a:solidFill>
-                          <a:latin typeface="Arial"/>
-                        </a:defRPr>
-                      </a:pPr>
-                      <a:r>
-                        <a:t>LOT001</a:t>
-                      </a:r>
-                    </a:p>
-                  </a:txBody>
-                  <a:tcPr>
-                    <a:solidFill>
-                      <a:srgbClr val="F8FAFC"/>
-                    </a:solidFill>
-                  </a:tcPr>
-                </a:tc>
-                <a:tc>
-                  <a:txBody>
-                    <a:bodyPr/>
-                    <a:lstStyle/>
-                    <a:p>
-                      <a:pPr algn="ctr">
-                        <a:defRPr sz="800">
-                          <a:solidFill>
-                            <a:srgbClr val="1F2937"/>
-                          </a:solidFill>
-                          <a:latin typeface="Arial"/>
-                        </a:defRPr>
-                      </a:pPr>
-                      <a:r>
-                        <a:t>1</a:t>
-                      </a:r>
-                    </a:p>
-                  </a:txBody>
-                  <a:tcPr>
-                    <a:solidFill>
-                      <a:srgbClr val="F8FAFC"/>
-                    </a:solidFill>
-                  </a:tcPr>
-                </a:tc>
-                <a:tc>
-                  <a:txBody>
-                    <a:bodyPr/>
-                    <a:lstStyle/>
-                    <a:p>
-                      <a:pPr algn="ctr">
-                        <a:defRPr sz="800">
-                          <a:solidFill>
-                            <a:srgbClr val="1F2937"/>
-                          </a:solidFill>
-                          <a:latin typeface="Arial"/>
-                        </a:defRPr>
-                      </a:pPr>
-                      <a:r>
-                        <a:t>STEP001</a:t>
-                      </a:r>
-                    </a:p>
-                  </a:txBody>
-                  <a:tcPr>
-                    <a:solidFill>
-                      <a:srgbClr val="F8FAFC"/>
-                    </a:solidFill>
-                  </a:tcPr>
-                </a:tc>
-                <a:tc>
-                  <a:txBody>
-                    <a:bodyPr/>
-                    <a:lstStyle/>
-                    <a:p>
-                      <a:pPr algn="ctr">
-                        <a:defRPr sz="800">
-                          <a:solidFill>
-                            <a:srgbClr val="1F2937"/>
-                          </a:solidFill>
-                          <a:latin typeface="Arial"/>
-                        </a:defRPr>
-                      </a:pPr>
-                      <a:r>
-                        <a:t>2026-01-01 00:00:00</a:t>
-                      </a:r>
-                    </a:p>
-                  </a:txBody>
-                  <a:tcPr>
-                    <a:solidFill>
-                      <a:srgbClr val="F8FAFC"/>
-                    </a:solidFill>
-                  </a:tcPr>
-                </a:tc>
-                <a:tc>
-                  <a:txBody>
-                    <a:bodyPr/>
-                    <a:lstStyle/>
-                    <a:p>
-                      <a:pPr algn="ctr">
-                        <a:defRPr sz="800">
-                          <a:solidFill>
-                            <a:srgbClr val="1F2937"/>
-                          </a:solidFill>
-                          <a:latin typeface="Arial"/>
-                        </a:defRPr>
-                      </a:pPr>
-                      <a:r>
-                        <a:t>EQP_01</a:t>
-                      </a:r>
-                    </a:p>
-                  </a:txBody>
-                  <a:tcPr>
-                    <a:solidFill>
-                      <a:srgbClr val="F8FAFC"/>
-                    </a:solidFill>
-                  </a:tcPr>
-                </a:tc>
-                <a:tc>
-                  <a:txBody>
-                    <a:bodyPr/>
-                    <a:lstStyle/>
-                    <a:p>
-                      <a:pPr algn="ctr">
-                        <a:defRPr sz="800">
-                          <a:solidFill>
-                            <a:srgbClr val="1F2937"/>
-                          </a:solidFill>
-                          <a:latin typeface="Arial"/>
-                        </a:defRPr>
-                      </a:pPr>
-                      <a:r>
-                        <a:t>1</a:t>
-                      </a:r>
-                    </a:p>
-                  </a:txBody>
-                  <a:tcPr>
-                    <a:solidFill>
-                      <a:srgbClr val="F8FAFC"/>
-                    </a:solidFill>
-                  </a:tcPr>
-                </a:tc>
-                <a:tc>
-                  <a:txBody>
-                    <a:bodyPr/>
-                    <a:lstStyle/>
-                    <a:p>
-                      <a:pPr algn="ctr">
-                        <a:defRPr sz="800">
-                          <a:solidFill>
-                            <a:srgbClr val="1F2937"/>
-                          </a:solidFill>
-                          <a:latin typeface="Arial"/>
-                        </a:defRPr>
-                      </a:pPr>
-                      <a:r>
-                        <a:t>1</a:t>
-                      </a:r>
-                    </a:p>
-                  </a:txBody>
-                  <a:tcPr>
-                    <a:solidFill>
-                      <a:srgbClr val="F8FAFC"/>
-                    </a:solidFill>
-                  </a:tcPr>
-                </a:tc>
-                <a:tc>
-                  <a:txBody>
-                    <a:bodyPr/>
-                    <a:lstStyle/>
-                    <a:p>
-                      <a:pPr algn="ctr">
-                        <a:defRPr sz="800">
-                          <a:solidFill>
-                            <a:srgbClr val="1F2937"/>
-                          </a:solidFill>
-                          <a:latin typeface="Arial"/>
-                        </a:defRPr>
-                      </a:pPr>
-                      <a:r>
-                        <a:t>52</a:t>
-                      </a:r>
-                    </a:p>
-                  </a:txBody>
-                  <a:tcPr>
-                    <a:solidFill>
-                      <a:srgbClr val="F8FAFC"/>
-                    </a:solidFill>
-                  </a:tcPr>
-                </a:tc>
-              </a:tr>
-              <a:tr h="287767">
-                <a:tc>
-                  <a:txBody>
-                    <a:bodyPr/>
-                    <a:lstStyle/>
-                    <a:p>
-                      <a:pPr algn="ctr">
-                        <a:defRPr sz="800">
-                          <a:solidFill>
-                            <a:srgbClr val="1F2937"/>
-                          </a:solidFill>
-                          <a:latin typeface="Arial"/>
-                        </a:defRPr>
-                      </a:pPr>
-                      <a:r>
-                        <a:t>LOT001</a:t>
-                      </a:r>
-                    </a:p>
-                  </a:txBody>
-                  <a:tcPr>
-                    <a:solidFill>
-                      <a:srgbClr val="FFFFFF"/>
-                    </a:solidFill>
-                  </a:tcPr>
-                </a:tc>
-                <a:tc>
-                  <a:txBody>
-                    <a:bodyPr/>
-                    <a:lstStyle/>
-                    <a:p>
-                      <a:pPr algn="ctr">
-                        <a:defRPr sz="800">
-                          <a:solidFill>
-                            <a:srgbClr val="1F2937"/>
-                          </a:solidFill>
-                          <a:latin typeface="Arial"/>
-                        </a:defRPr>
-                      </a:pPr>
-                      <a:r>
-                        <a:t>2</a:t>
-                      </a:r>
-                    </a:p>
-                  </a:txBody>
-                  <a:tcPr>
-                    <a:solidFill>
-                      <a:srgbClr val="FFFFFF"/>
-                    </a:solidFill>
-                  </a:tcPr>
-                </a:tc>
-                <a:tc>
-                  <a:txBody>
-                    <a:bodyPr/>
-                    <a:lstStyle/>
-                    <a:p>
-                      <a:pPr algn="ctr">
-                        <a:defRPr sz="800">
-                          <a:solidFill>
-                            <a:srgbClr val="1F2937"/>
-                          </a:solidFill>
-                          <a:latin typeface="Arial"/>
-                        </a:defRPr>
-                      </a:pPr>
-                      <a:r>
-                        <a:t>STEP001</a:t>
-                      </a:r>
-                    </a:p>
-                  </a:txBody>
-                  <a:tcPr>
-                    <a:solidFill>
-                      <a:srgbClr val="FFFFFF"/>
-                    </a:solidFill>
-                  </a:tcPr>
-                </a:tc>
-                <a:tc>
-                  <a:txBody>
-                    <a:bodyPr/>
-                    <a:lstStyle/>
-                    <a:p>
-                      <a:pPr algn="ctr">
-                        <a:defRPr sz="800">
-                          <a:solidFill>
-                            <a:srgbClr val="1F2937"/>
-                          </a:solidFill>
-                          <a:latin typeface="Arial"/>
-                        </a:defRPr>
-                      </a:pPr>
-                      <a:r>
-                        <a:t>2026-01-01 00:00:00</a:t>
-                      </a:r>
-                    </a:p>
-                  </a:txBody>
-                  <a:tcPr>
-                    <a:solidFill>
-                      <a:srgbClr val="FFFFFF"/>
-                    </a:solidFill>
-                  </a:tcPr>
-                </a:tc>
-                <a:tc>
-                  <a:txBody>
-                    <a:bodyPr/>
-                    <a:lstStyle/>
-                    <a:p>
-                      <a:pPr algn="ctr">
-                        <a:defRPr sz="800">
-                          <a:solidFill>
-                            <a:srgbClr val="1F2937"/>
-                          </a:solidFill>
-                          <a:latin typeface="Arial"/>
-                        </a:defRPr>
-                      </a:pPr>
-                      <a:r>
-                        <a:t>EQP_01</a:t>
-                      </a:r>
-                    </a:p>
-                  </a:txBody>
-                  <a:tcPr>
-                    <a:solidFill>
-                      <a:srgbClr val="FFFFFF"/>
-                    </a:solidFill>
-                  </a:tcPr>
-                </a:tc>
-                <a:tc>
-                  <a:txBody>
-                    <a:bodyPr/>
-                    <a:lstStyle/>
-                    <a:p>
-                      <a:pPr algn="ctr">
-                        <a:defRPr sz="800">
-                          <a:solidFill>
-                            <a:srgbClr val="1F2937"/>
-                          </a:solidFill>
-                          <a:latin typeface="Arial"/>
-                        </a:defRPr>
-                      </a:pPr>
-                      <a:r>
-                        <a:t>-1</a:t>
-                      </a:r>
-                    </a:p>
-                  </a:txBody>
-                  <a:tcPr>
-                    <a:solidFill>
-                      <a:srgbClr val="FFFFFF"/>
-                    </a:solidFill>
-                  </a:tcPr>
-                </a:tc>
-                <a:tc>
-                  <a:txBody>
-                    <a:bodyPr/>
-                    <a:lstStyle/>
-                    <a:p>
-                      <a:pPr algn="ctr">
-                        <a:defRPr sz="800">
-                          <a:solidFill>
-                            <a:srgbClr val="1F2937"/>
-                          </a:solidFill>
-                          <a:latin typeface="Arial"/>
-                        </a:defRPr>
-                      </a:pPr>
-                      <a:r>
-                        <a:t>-1</a:t>
-                      </a:r>
-                    </a:p>
-                  </a:txBody>
-                  <a:tcPr>
-                    <a:solidFill>
-                      <a:srgbClr val="FFFFFF"/>
-                    </a:solidFill>
-                  </a:tcPr>
-                </a:tc>
-                <a:tc>
-                  <a:txBody>
-                    <a:bodyPr/>
-                    <a:lstStyle/>
-                    <a:p>
-                      <a:pPr algn="ctr">
-                        <a:defRPr sz="800">
-                          <a:solidFill>
-                            <a:srgbClr val="1F2937"/>
-                          </a:solidFill>
-                          <a:latin typeface="Arial"/>
-                        </a:defRPr>
-                      </a:pPr>
-                      <a:r>
-                        <a:t>62</a:t>
-                      </a:r>
-                    </a:p>
-                  </a:txBody>
-                  <a:tcPr>
-                    <a:solidFill>
-                      <a:srgbClr val="FFFFFF"/>
-                    </a:solidFill>
-                  </a:tcPr>
-                </a:tc>
-              </a:tr>
-              <a:tr h="287767">
-                <a:tc>
-                  <a:txBody>
-                    <a:bodyPr/>
-                    <a:lstStyle/>
-                    <a:p>
-                      <a:pPr algn="ctr">
-                        <a:defRPr sz="800">
-                          <a:solidFill>
-                            <a:srgbClr val="1F2937"/>
-                          </a:solidFill>
-                          <a:latin typeface="Arial"/>
-                        </a:defRPr>
-                      </a:pPr>
-                      <a:r>
-                        <a:t>LOT001</a:t>
-                      </a:r>
-                    </a:p>
-                  </a:txBody>
-                  <a:tcPr>
-                    <a:solidFill>
-                      <a:srgbClr val="F8FAFC"/>
-                    </a:solidFill>
-                  </a:tcPr>
-                </a:tc>
-                <a:tc>
-                  <a:txBody>
-                    <a:bodyPr/>
-                    <a:lstStyle/>
-                    <a:p>
-                      <a:pPr algn="ctr">
-                        <a:defRPr sz="800">
-                          <a:solidFill>
-                            <a:srgbClr val="1F2937"/>
-                          </a:solidFill>
-                          <a:latin typeface="Arial"/>
-                        </a:defRPr>
-                      </a:pPr>
-                      <a:r>
-                        <a:t>2</a:t>
-                      </a:r>
-                    </a:p>
-                  </a:txBody>
-                  <a:tcPr>
-                    <a:solidFill>
-                      <a:srgbClr val="F8FAFC"/>
-                    </a:solidFill>
-                  </a:tcPr>
-                </a:tc>
-                <a:tc>
-                  <a:txBody>
-                    <a:bodyPr/>
-                    <a:lstStyle/>
-                    <a:p>
-                      <a:pPr algn="ctr">
-                        <a:defRPr sz="800">
-                          <a:solidFill>
-                            <a:srgbClr val="1F2937"/>
-                          </a:solidFill>
-                          <a:latin typeface="Arial"/>
-                        </a:defRPr>
-                      </a:pPr>
-                      <a:r>
-                        <a:t>STEP001</a:t>
-                      </a:r>
-                    </a:p>
-                  </a:txBody>
-                  <a:tcPr>
-                    <a:solidFill>
-                      <a:srgbClr val="F8FAFC"/>
-                    </a:solidFill>
-                  </a:tcPr>
-                </a:tc>
-                <a:tc>
-                  <a:txBody>
-                    <a:bodyPr/>
-                    <a:lstStyle/>
-                    <a:p>
-                      <a:pPr algn="ctr">
-                        <a:defRPr sz="800">
-                          <a:solidFill>
-                            <a:srgbClr val="1F2937"/>
-                          </a:solidFill>
-                          <a:latin typeface="Arial"/>
-                        </a:defRPr>
-                      </a:pPr>
-                      <a:r>
-                        <a:t>2026-01-01 00:00:00</a:t>
-                      </a:r>
-                    </a:p>
-                  </a:txBody>
-                  <a:tcPr>
-                    <a:solidFill>
-                      <a:srgbClr val="F8FAFC"/>
-                    </a:solidFill>
-                  </a:tcPr>
-                </a:tc>
-                <a:tc>
-                  <a:txBody>
-                    <a:bodyPr/>
-                    <a:lstStyle/>
-                    <a:p>
-                      <a:pPr algn="ctr">
-                        <a:defRPr sz="800">
-                          <a:solidFill>
-                            <a:srgbClr val="1F2937"/>
-                          </a:solidFill>
-                          <a:latin typeface="Arial"/>
-                        </a:defRPr>
-                      </a:pPr>
-                      <a:r>
-                        <a:t>EQP_01</a:t>
-                      </a:r>
-                    </a:p>
-                  </a:txBody>
-                  <a:tcPr>
-                    <a:solidFill>
-                      <a:srgbClr val="F8FAFC"/>
-                    </a:solidFill>
-                  </a:tcPr>
-                </a:tc>
-                <a:tc>
-                  <a:txBody>
-                    <a:bodyPr/>
-                    <a:lstStyle/>
-                    <a:p>
-                      <a:pPr algn="ctr">
-                        <a:defRPr sz="800">
-                          <a:solidFill>
-                            <a:srgbClr val="1F2937"/>
-                          </a:solidFill>
-                          <a:latin typeface="Arial"/>
-                        </a:defRPr>
-                      </a:pPr>
-                      <a:r>
-                        <a:t>-1</a:t>
-                      </a:r>
-                    </a:p>
-                  </a:txBody>
-                  <a:tcPr>
-                    <a:solidFill>
-                      <a:srgbClr val="F8FAFC"/>
-                    </a:solidFill>
-                  </a:tcPr>
-                </a:tc>
-                <a:tc>
-                  <a:txBody>
-                    <a:bodyPr/>
-                    <a:lstStyle/>
-                    <a:p>
-                      <a:pPr algn="ctr">
-                        <a:defRPr sz="800">
-                          <a:solidFill>
-                            <a:srgbClr val="1F2937"/>
-                          </a:solidFill>
-                          <a:latin typeface="Arial"/>
-                        </a:defRPr>
-                      </a:pPr>
-                      <a:r>
-                        <a:t>0</a:t>
-                      </a:r>
-                    </a:p>
-                  </a:txBody>
-                  <a:tcPr>
-                    <a:solidFill>
-                      <a:srgbClr val="F8FAFC"/>
-                    </a:solidFill>
-                  </a:tcPr>
-                </a:tc>
-                <a:tc>
-                  <a:txBody>
-                    <a:bodyPr/>
-                    <a:lstStyle/>
-                    <a:p>
-                      <a:pPr algn="ctr">
-                        <a:defRPr sz="800">
-                          <a:solidFill>
-                            <a:srgbClr val="1F2937"/>
-                          </a:solidFill>
-                          <a:latin typeface="Arial"/>
-                        </a:defRPr>
-                      </a:pPr>
-                      <a:r>
-                        <a:t>61.5</a:t>
-                      </a:r>
-                    </a:p>
-                  </a:txBody>
-                  <a:tcPr>
-                    <a:solidFill>
-                      <a:srgbClr val="F8FAFC"/>
-                    </a:solidFill>
-                  </a:tcPr>
-                </a:tc>
-              </a:tr>
-              <a:tr h="287767">
-                <a:tc>
-                  <a:txBody>
-                    <a:bodyPr/>
-                    <a:lstStyle/>
-                    <a:p>
-                      <a:pPr algn="ctr">
-                        <a:defRPr sz="800">
-                          <a:solidFill>
-                            <a:srgbClr val="1F2937"/>
-                          </a:solidFill>
-                          <a:latin typeface="Arial"/>
-                        </a:defRPr>
-                      </a:pPr>
-                      <a:r>
-                        <a:t>LOT001</a:t>
-                      </a:r>
-                    </a:p>
-                  </a:txBody>
-                  <a:tcPr>
-                    <a:solidFill>
-                      <a:srgbClr val="FFFFFF"/>
-                    </a:solidFill>
-                  </a:tcPr>
-                </a:tc>
-                <a:tc>
-                  <a:txBody>
-                    <a:bodyPr/>
-                    <a:lstStyle/>
-                    <a:p>
-                      <a:pPr algn="ctr">
-                        <a:defRPr sz="800">
-                          <a:solidFill>
-                            <a:srgbClr val="1F2937"/>
-                          </a:solidFill>
-                          <a:latin typeface="Arial"/>
-                        </a:defRPr>
-                      </a:pPr>
-                      <a:r>
-                        <a:t>2</a:t>
-                      </a:r>
-                    </a:p>
-                  </a:txBody>
-                  <a:tcPr>
-                    <a:solidFill>
-                      <a:srgbClr val="FFFFFF"/>
-                    </a:solidFill>
-                  </a:tcPr>
-                </a:tc>
-                <a:tc>
-                  <a:txBody>
-                    <a:bodyPr/>
-                    <a:lstStyle/>
-                    <a:p>
-                      <a:pPr algn="ctr">
-                        <a:defRPr sz="800">
-                          <a:solidFill>
-                            <a:srgbClr val="1F2937"/>
-                          </a:solidFill>
-                          <a:latin typeface="Arial"/>
-                        </a:defRPr>
-                      </a:pPr>
-                      <a:r>
-                        <a:t>STEP001</a:t>
-                      </a:r>
-                    </a:p>
-                  </a:txBody>
-                  <a:tcPr>
-                    <a:solidFill>
-                      <a:srgbClr val="FFFFFF"/>
-                    </a:solidFill>
-                  </a:tcPr>
-                </a:tc>
-                <a:tc>
-                  <a:txBody>
-                    <a:bodyPr/>
-                    <a:lstStyle/>
-                    <a:p>
-                      <a:pPr algn="ctr">
-                        <a:defRPr sz="800">
-                          <a:solidFill>
-                            <a:srgbClr val="1F2937"/>
-                          </a:solidFill>
-                          <a:latin typeface="Arial"/>
-                        </a:defRPr>
-                      </a:pPr>
-                      <a:r>
-                        <a:t>2026-01-01 00:00:00</a:t>
-                      </a:r>
-                    </a:p>
-                  </a:txBody>
-                  <a:tcPr>
-                    <a:solidFill>
-                      <a:srgbClr val="FFFFFF"/>
-                    </a:solidFill>
-                  </a:tcPr>
-                </a:tc>
-                <a:tc>
-                  <a:txBody>
-                    <a:bodyPr/>
-                    <a:lstStyle/>
-                    <a:p>
-                      <a:pPr algn="ctr">
-                        <a:defRPr sz="800">
-                          <a:solidFill>
-                            <a:srgbClr val="1F2937"/>
-                          </a:solidFill>
-                          <a:latin typeface="Arial"/>
-                        </a:defRPr>
-                      </a:pPr>
-                      <a:r>
-                        <a:t>EQP_01</a:t>
-                      </a:r>
-                    </a:p>
-                  </a:txBody>
-                  <a:tcPr>
-                    <a:solidFill>
-                      <a:srgbClr val="FFFFFF"/>
-                    </a:solidFill>
-                  </a:tcPr>
-                </a:tc>
-                <a:tc>
-                  <a:txBody>
-                    <a:bodyPr/>
-                    <a:lstStyle/>
-                    <a:p>
-                      <a:pPr algn="ctr">
-                        <a:defRPr sz="800">
-                          <a:solidFill>
-                            <a:srgbClr val="1F2937"/>
-                          </a:solidFill>
-                          <a:latin typeface="Arial"/>
-                        </a:defRPr>
-                      </a:pPr>
-                      <a:r>
-                        <a:t>-1</a:t>
-                      </a:r>
-                    </a:p>
-                  </a:txBody>
-                  <a:tcPr>
-                    <a:solidFill>
-                      <a:srgbClr val="FFFFFF"/>
-                    </a:solidFill>
-                  </a:tcPr>
-                </a:tc>
-                <a:tc>
-                  <a:txBody>
-                    <a:bodyPr/>
-                    <a:lstStyle/>
-                    <a:p>
-                      <a:pPr algn="ctr">
-                        <a:defRPr sz="800">
-                          <a:solidFill>
-                            <a:srgbClr val="1F2937"/>
-                          </a:solidFill>
-                          <a:latin typeface="Arial"/>
-                        </a:defRPr>
-                      </a:pPr>
-                      <a:r>
-                        <a:t>1</a:t>
-                      </a:r>
-                    </a:p>
-                  </a:txBody>
-                  <a:tcPr>
-                    <a:solidFill>
-                      <a:srgbClr val="FFFFFF"/>
-                    </a:solidFill>
-                  </a:tcPr>
-                </a:tc>
-                <a:tc>
-                  <a:txBody>
-                    <a:bodyPr/>
-                    <a:lstStyle/>
-                    <a:p>
-                      <a:pPr algn="ctr">
-                        <a:defRPr sz="800">
-                          <a:solidFill>
-                            <a:srgbClr val="1F2937"/>
-                          </a:solidFill>
-                          <a:latin typeface="Arial"/>
-                        </a:defRPr>
-                      </a:pPr>
-                      <a:r>
-                        <a:t>61</a:t>
-                      </a:r>
-                    </a:p>
-                  </a:txBody>
-                  <a:tcPr>
-                    <a:solidFill>
-                      <a:srgbClr val="FFFFFF"/>
-                    </a:solidFill>
-                  </a:tcPr>
-                </a:tc>
-              </a:tr>
-              <a:tr h="287767">
-                <a:tc>
-                  <a:txBody>
-                    <a:bodyPr/>
-                    <a:lstStyle/>
-                    <a:p>
-                      <a:pPr algn="ctr">
-                        <a:defRPr sz="800">
-                          <a:solidFill>
-                            <a:srgbClr val="1F2937"/>
-                          </a:solidFill>
-                          <a:latin typeface="Arial"/>
-                        </a:defRPr>
-                      </a:pPr>
-                      <a:r>
-                        <a:t>LOT001</a:t>
-                      </a:r>
-                    </a:p>
-                  </a:txBody>
-                  <a:tcPr>
-                    <a:solidFill>
-                      <a:srgbClr val="F8FAFC"/>
-                    </a:solidFill>
-                  </a:tcPr>
-                </a:tc>
-                <a:tc>
-                  <a:txBody>
-                    <a:bodyPr/>
-                    <a:lstStyle/>
-                    <a:p>
-                      <a:pPr algn="ctr">
-                        <a:defRPr sz="800">
-                          <a:solidFill>
-                            <a:srgbClr val="1F2937"/>
-                          </a:solidFill>
-                          <a:latin typeface="Arial"/>
-                        </a:defRPr>
-                      </a:pPr>
-                      <a:r>
-                        <a:t>2</a:t>
-                      </a:r>
-                    </a:p>
-                  </a:txBody>
-                  <a:tcPr>
-                    <a:solidFill>
-                      <a:srgbClr val="F8FAFC"/>
-                    </a:solidFill>
-                  </a:tcPr>
-                </a:tc>
-                <a:tc>
-                  <a:txBody>
-                    <a:bodyPr/>
-                    <a:lstStyle/>
-                    <a:p>
-                      <a:pPr algn="ctr">
-                        <a:defRPr sz="800">
-                          <a:solidFill>
-                            <a:srgbClr val="1F2937"/>
-                          </a:solidFill>
-                          <a:latin typeface="Arial"/>
-                        </a:defRPr>
-                      </a:pPr>
-                      <a:r>
-                        <a:t>STEP001</a:t>
-                      </a:r>
-                    </a:p>
-                  </a:txBody>
-                  <a:tcPr>
-                    <a:solidFill>
-                      <a:srgbClr val="F8FAFC"/>
-                    </a:solidFill>
-                  </a:tcPr>
-                </a:tc>
-                <a:tc>
-                  <a:txBody>
-                    <a:bodyPr/>
-                    <a:lstStyle/>
-                    <a:p>
-                      <a:pPr algn="ctr">
-                        <a:defRPr sz="800">
-                          <a:solidFill>
-                            <a:srgbClr val="1F2937"/>
-                          </a:solidFill>
-                          <a:latin typeface="Arial"/>
-                        </a:defRPr>
-                      </a:pPr>
-                      <a:r>
-                        <a:t>2026-01-01 00:00:00</a:t>
-                      </a:r>
-                    </a:p>
-                  </a:txBody>
-                  <a:tcPr>
-                    <a:solidFill>
-                      <a:srgbClr val="F8FAFC"/>
-                    </a:solidFill>
-                  </a:tcPr>
-                </a:tc>
-                <a:tc>
-                  <a:txBody>
-                    <a:bodyPr/>
-                    <a:lstStyle/>
-                    <a:p>
-                      <a:pPr algn="ctr">
-                        <a:defRPr sz="800">
-                          <a:solidFill>
-                            <a:srgbClr val="1F2937"/>
-                          </a:solidFill>
-                          <a:latin typeface="Arial"/>
-                        </a:defRPr>
-                      </a:pPr>
-                      <a:r>
-                        <a:t>EQP_01</a:t>
-                      </a:r>
-                    </a:p>
-                  </a:txBody>
-                  <a:tcPr>
-                    <a:solidFill>
-                      <a:srgbClr val="F8FAFC"/>
-                    </a:solidFill>
-                  </a:tcPr>
-                </a:tc>
-                <a:tc>
-                  <a:txBody>
-                    <a:bodyPr/>
-                    <a:lstStyle/>
-                    <a:p>
-                      <a:pPr algn="ctr">
-                        <a:defRPr sz="800">
-                          <a:solidFill>
-                            <a:srgbClr val="1F2937"/>
-                          </a:solidFill>
-                          <a:latin typeface="Arial"/>
-                        </a:defRPr>
-                      </a:pPr>
-                      <a:r>
-                        <a:t>0</a:t>
-                      </a:r>
-                    </a:p>
-                  </a:txBody>
-                  <a:tcPr>
-                    <a:solidFill>
-                      <a:srgbClr val="F8FAFC"/>
-                    </a:solidFill>
-                  </a:tcPr>
-                </a:tc>
-                <a:tc>
-                  <a:txBody>
-                    <a:bodyPr/>
-                    <a:lstStyle/>
-                    <a:p>
-                      <a:pPr algn="ctr">
-                        <a:defRPr sz="800">
-                          <a:solidFill>
-                            <a:srgbClr val="1F2937"/>
-                          </a:solidFill>
-                          <a:latin typeface="Arial"/>
-                        </a:defRPr>
-                      </a:pPr>
-                      <a:r>
-                        <a:t>-1</a:t>
-                      </a:r>
-                    </a:p>
-                  </a:txBody>
-                  <a:tcPr>
-                    <a:solidFill>
-                      <a:srgbClr val="F8FAFC"/>
-                    </a:solidFill>
-                  </a:tcPr>
-                </a:tc>
-                <a:tc>
-                  <a:txBody>
-                    <a:bodyPr/>
-                    <a:lstStyle/>
-                    <a:p>
-                      <a:pPr algn="ctr">
-                        <a:defRPr sz="800">
-                          <a:solidFill>
-                            <a:srgbClr val="1F2937"/>
-                          </a:solidFill>
-                          <a:latin typeface="Arial"/>
-                        </a:defRPr>
-                      </a:pPr>
-                      <a:r>
-                        <a:t>62.5</a:t>
-                      </a:r>
-                    </a:p>
-                  </a:txBody>
-                  <a:tcPr>
-                    <a:solidFill>
-                      <a:srgbClr val="F8FAFC"/>
-                    </a:solidFill>
-                  </a:tcPr>
-                </a:tc>
-              </a:tr>
-              <a:tr h="287767">
-                <a:tc>
-                  <a:txBody>
-                    <a:bodyPr/>
-                    <a:lstStyle/>
-                    <a:p>
-                      <a:pPr algn="ctr">
-                        <a:defRPr sz="800">
-                          <a:solidFill>
-                            <a:srgbClr val="1F2937"/>
-                          </a:solidFill>
-                          <a:latin typeface="Arial"/>
-                        </a:defRPr>
-                      </a:pPr>
-                      <a:r>
-                        <a:t>LOT001</a:t>
-                      </a:r>
-                    </a:p>
-                  </a:txBody>
-                  <a:tcPr>
-                    <a:solidFill>
-                      <a:srgbClr val="FFFFFF"/>
-                    </a:solidFill>
-                  </a:tcPr>
-                </a:tc>
-                <a:tc>
-                  <a:txBody>
-                    <a:bodyPr/>
-                    <a:lstStyle/>
-                    <a:p>
-                      <a:pPr algn="ctr">
-                        <a:defRPr sz="800">
-                          <a:solidFill>
-                            <a:srgbClr val="1F2937"/>
-                          </a:solidFill>
-                          <a:latin typeface="Arial"/>
-                        </a:defRPr>
-                      </a:pPr>
-                      <a:r>
-                        <a:t>2</a:t>
-                      </a:r>
-                    </a:p>
-                  </a:txBody>
-                  <a:tcPr>
-                    <a:solidFill>
-                      <a:srgbClr val="FFFFFF"/>
-                    </a:solidFill>
-                  </a:tcPr>
-                </a:tc>
-                <a:tc>
-                  <a:txBody>
-                    <a:bodyPr/>
-                    <a:lstStyle/>
-                    <a:p>
-                      <a:pPr algn="ctr">
-                        <a:defRPr sz="800">
-                          <a:solidFill>
-                            <a:srgbClr val="1F2937"/>
-                          </a:solidFill>
-                          <a:latin typeface="Arial"/>
-                        </a:defRPr>
-                      </a:pPr>
-                      <a:r>
-                        <a:t>STEP001</a:t>
-                      </a:r>
-                    </a:p>
-                  </a:txBody>
-                  <a:tcPr>
-                    <a:solidFill>
-                      <a:srgbClr val="FFFFFF"/>
-                    </a:solidFill>
-                  </a:tcPr>
-                </a:tc>
-                <a:tc>
-                  <a:txBody>
-                    <a:bodyPr/>
-                    <a:lstStyle/>
-                    <a:p>
-                      <a:pPr algn="ctr">
-                        <a:defRPr sz="800">
-                          <a:solidFill>
-                            <a:srgbClr val="1F2937"/>
-                          </a:solidFill>
-                          <a:latin typeface="Arial"/>
-                        </a:defRPr>
-                      </a:pPr>
-                      <a:r>
-                        <a:t>2026-01-01 00:00:00</a:t>
-                      </a:r>
-                    </a:p>
-                  </a:txBody>
-                  <a:tcPr>
-                    <a:solidFill>
-                      <a:srgbClr val="FFFFFF"/>
-                    </a:solidFill>
-                  </a:tcPr>
-                </a:tc>
-                <a:tc>
-                  <a:txBody>
-                    <a:bodyPr/>
-                    <a:lstStyle/>
-                    <a:p>
-                      <a:pPr algn="ctr">
-                        <a:defRPr sz="800">
-                          <a:solidFill>
-                            <a:srgbClr val="1F2937"/>
-                          </a:solidFill>
-                          <a:latin typeface="Arial"/>
-                        </a:defRPr>
-                      </a:pPr>
-                      <a:r>
-                        <a:t>EQP_01</a:t>
-                      </a:r>
-                    </a:p>
-                  </a:txBody>
-                  <a:tcPr>
-                    <a:solidFill>
-                      <a:srgbClr val="FFFFFF"/>
-                    </a:solidFill>
-                  </a:tcPr>
-                </a:tc>
-                <a:tc>
-                  <a:txBody>
-                    <a:bodyPr/>
-                    <a:lstStyle/>
-                    <a:p>
-                      <a:pPr algn="ctr">
-                        <a:defRPr sz="800">
-                          <a:solidFill>
-                            <a:srgbClr val="1F2937"/>
-                          </a:solidFill>
-                          <a:latin typeface="Arial"/>
-                        </a:defRPr>
-                      </a:pPr>
-                      <a:r>
-                        <a:t>0</a:t>
-                      </a:r>
-                    </a:p>
-                  </a:txBody>
-                  <a:tcPr>
-                    <a:solidFill>
-                      <a:srgbClr val="FFFFFF"/>
-                    </a:solidFill>
-                  </a:tcPr>
-                </a:tc>
-                <a:tc>
-                  <a:txBody>
-                    <a:bodyPr/>
-                    <a:lstStyle/>
-                    <a:p>
-                      <a:pPr algn="ctr">
-                        <a:defRPr sz="800">
-                          <a:solidFill>
-                            <a:srgbClr val="1F2937"/>
-                          </a:solidFill>
-                          <a:latin typeface="Arial"/>
-                        </a:defRPr>
-                      </a:pPr>
-                      <a:r>
-                        <a:t>0</a:t>
-                      </a:r>
-                    </a:p>
-                  </a:txBody>
-                  <a:tcPr>
-                    <a:solidFill>
-                      <a:srgbClr val="FFFFFF"/>
-                    </a:solidFill>
-                  </a:tcPr>
-                </a:tc>
-                <a:tc>
-                  <a:txBody>
-                    <a:bodyPr/>
-                    <a:lstStyle/>
-                    <a:p>
-                      <a:pPr algn="ctr">
-                        <a:defRPr sz="800">
-                          <a:solidFill>
-                            <a:srgbClr val="1F2937"/>
-                          </a:solidFill>
-                          <a:latin typeface="Arial"/>
-                        </a:defRPr>
-                      </a:pPr>
-                      <a:r>
-                        <a:t>62</a:t>
-                      </a:r>
-                    </a:p>
-                  </a:txBody>
-                  <a:tcPr>
-                    <a:solidFill>
-                      <a:srgbClr val="FFFFFF"/>
-                    </a:solidFill>
-                  </a:tcPr>
-                </a:tc>
-              </a:tr>
-              <a:tr h="287767">
-                <a:tc>
-                  <a:txBody>
-                    <a:bodyPr/>
-                    <a:lstStyle/>
-                    <a:p>
-                      <a:pPr algn="ctr">
-                        <a:defRPr sz="800">
-                          <a:solidFill>
-                            <a:srgbClr val="1F2937"/>
-                          </a:solidFill>
-                          <a:latin typeface="Arial"/>
-                        </a:defRPr>
-                      </a:pPr>
-                      <a:r>
-                        <a:t>LOT001</a:t>
-                      </a:r>
-                    </a:p>
-                  </a:txBody>
-                  <a:tcPr>
-                    <a:solidFill>
-                      <a:srgbClr val="F8FAFC"/>
-                    </a:solidFill>
-                  </a:tcPr>
-                </a:tc>
-                <a:tc>
-                  <a:txBody>
-                    <a:bodyPr/>
-                    <a:lstStyle/>
-                    <a:p>
-                      <a:pPr algn="ctr">
-                        <a:defRPr sz="800">
-                          <a:solidFill>
-                            <a:srgbClr val="1F2937"/>
-                          </a:solidFill>
-                          <a:latin typeface="Arial"/>
-                        </a:defRPr>
-                      </a:pPr>
-                      <a:r>
-                        <a:t>2</a:t>
-                      </a:r>
-                    </a:p>
-                  </a:txBody>
-                  <a:tcPr>
-                    <a:solidFill>
-                      <a:srgbClr val="F8FAFC"/>
-                    </a:solidFill>
-                  </a:tcPr>
-                </a:tc>
-                <a:tc>
-                  <a:txBody>
-                    <a:bodyPr/>
-                    <a:lstStyle/>
-                    <a:p>
-                      <a:pPr algn="ctr">
-                        <a:defRPr sz="800">
-                          <a:solidFill>
-                            <a:srgbClr val="1F2937"/>
-                          </a:solidFill>
-                          <a:latin typeface="Arial"/>
-                        </a:defRPr>
-                      </a:pPr>
-                      <a:r>
-                        <a:t>STEP001</a:t>
-                      </a:r>
-                    </a:p>
-                  </a:txBody>
-                  <a:tcPr>
-                    <a:solidFill>
-                      <a:srgbClr val="F8FAFC"/>
-                    </a:solidFill>
-                  </a:tcPr>
-                </a:tc>
-                <a:tc>
-                  <a:txBody>
-                    <a:bodyPr/>
-                    <a:lstStyle/>
-                    <a:p>
-                      <a:pPr algn="ctr">
-                        <a:defRPr sz="800">
-                          <a:solidFill>
-                            <a:srgbClr val="1F2937"/>
-                          </a:solidFill>
-                          <a:latin typeface="Arial"/>
-                        </a:defRPr>
-                      </a:pPr>
-                      <a:r>
-                        <a:t>2026-01-01 00:00:00</a:t>
-                      </a:r>
-                    </a:p>
-                  </a:txBody>
-                  <a:tcPr>
-                    <a:solidFill>
-                      <a:srgbClr val="F8FAFC"/>
-                    </a:solidFill>
-                  </a:tcPr>
-                </a:tc>
-                <a:tc>
-                  <a:txBody>
-                    <a:bodyPr/>
-                    <a:lstStyle/>
-                    <a:p>
-                      <a:pPr algn="ctr">
-                        <a:defRPr sz="800">
-                          <a:solidFill>
-                            <a:srgbClr val="1F2937"/>
-                          </a:solidFill>
-                          <a:latin typeface="Arial"/>
-                        </a:defRPr>
-                      </a:pPr>
-                      <a:r>
-                        <a:t>EQP_01</a:t>
-                      </a:r>
-                    </a:p>
-                  </a:txBody>
-                  <a:tcPr>
-                    <a:solidFill>
-                      <a:srgbClr val="F8FAFC"/>
-                    </a:solidFill>
-                  </a:tcPr>
-                </a:tc>
-                <a:tc>
-                  <a:txBody>
-                    <a:bodyPr/>
-                    <a:lstStyle/>
-                    <a:p>
-                      <a:pPr algn="ctr">
-                        <a:defRPr sz="800">
-                          <a:solidFill>
-                            <a:srgbClr val="1F2937"/>
-                          </a:solidFill>
-                          <a:latin typeface="Arial"/>
-                        </a:defRPr>
-                      </a:pPr>
-                      <a:r>
-                        <a:t>0</a:t>
-                      </a:r>
-                    </a:p>
-                  </a:txBody>
-                  <a:tcPr>
-                    <a:solidFill>
-                      <a:srgbClr val="F8FAFC"/>
-                    </a:solidFill>
-                  </a:tcPr>
-                </a:tc>
-                <a:tc>
-                  <a:txBody>
-                    <a:bodyPr/>
-                    <a:lstStyle/>
-                    <a:p>
-                      <a:pPr algn="ctr">
-                        <a:defRPr sz="800">
-                          <a:solidFill>
-                            <a:srgbClr val="1F2937"/>
-                          </a:solidFill>
-                          <a:latin typeface="Arial"/>
-                        </a:defRPr>
-                      </a:pPr>
-                      <a:r>
-                        <a:t>1</a:t>
-                      </a:r>
-                    </a:p>
-                  </a:txBody>
-                  <a:tcPr>
-                    <a:solidFill>
-                      <a:srgbClr val="F8FAFC"/>
-                    </a:solidFill>
-                  </a:tcPr>
-                </a:tc>
-                <a:tc>
-                  <a:txBody>
-                    <a:bodyPr/>
-                    <a:lstStyle/>
-                    <a:p>
-                      <a:pPr algn="ctr">
-                        <a:defRPr sz="800">
-                          <a:solidFill>
-                            <a:srgbClr val="1F2937"/>
-                          </a:solidFill>
-                          <a:latin typeface="Arial"/>
-                        </a:defRPr>
-                      </a:pPr>
-                      <a:r>
-                        <a:t>61.5</a:t>
-                      </a:r>
-                    </a:p>
-                  </a:txBody>
-                  <a:tcPr>
-                    <a:solidFill>
-                      <a:srgbClr val="F8FAFC"/>
-                    </a:solidFill>
-                  </a:tcPr>
-                </a:tc>
-              </a:tr>
-              <a:tr h="287768">
-                <a:tc>
-                  <a:txBody>
-                    <a:bodyPr/>
-                    <a:lstStyle/>
-                    <a:p>
-                      <a:pPr algn="ctr">
-                        <a:defRPr sz="800">
-                          <a:solidFill>
-                            <a:srgbClr val="1F2937"/>
-                          </a:solidFill>
-                          <a:latin typeface="Arial"/>
-                        </a:defRPr>
-                      </a:pPr>
-                      <a:r>
-                        <a:t>LOT001</a:t>
-                      </a:r>
-                    </a:p>
-                  </a:txBody>
-                  <a:tcPr>
-                    <a:solidFill>
-                      <a:srgbClr val="FFFFFF"/>
-                    </a:solidFill>
-                  </a:tcPr>
-                </a:tc>
-                <a:tc>
-                  <a:txBody>
-                    <a:bodyPr/>
-                    <a:lstStyle/>
-                    <a:p>
-                      <a:pPr algn="ctr">
-                        <a:defRPr sz="800">
-                          <a:solidFill>
-                            <a:srgbClr val="1F2937"/>
-                          </a:solidFill>
-                          <a:latin typeface="Arial"/>
-                        </a:defRPr>
-                      </a:pPr>
-                      <a:r>
-                        <a:t>2</a:t>
-                      </a:r>
-                    </a:p>
-                  </a:txBody>
-                  <a:tcPr>
-                    <a:solidFill>
-                      <a:srgbClr val="FFFFFF"/>
-                    </a:solidFill>
-                  </a:tcPr>
-                </a:tc>
-                <a:tc>
-                  <a:txBody>
-                    <a:bodyPr/>
-                    <a:lstStyle/>
-                    <a:p>
-                      <a:pPr algn="ctr">
-                        <a:defRPr sz="800">
-                          <a:solidFill>
-                            <a:srgbClr val="1F2937"/>
-                          </a:solidFill>
-                          <a:latin typeface="Arial"/>
-                        </a:defRPr>
-                      </a:pPr>
-                      <a:r>
-                        <a:t>STEP001</a:t>
-                      </a:r>
-                    </a:p>
-                  </a:txBody>
-                  <a:tcPr>
-                    <a:solidFill>
-                      <a:srgbClr val="FFFFFF"/>
-                    </a:solidFill>
-                  </a:tcPr>
-                </a:tc>
-                <a:tc>
-                  <a:txBody>
-                    <a:bodyPr/>
-                    <a:lstStyle/>
-                    <a:p>
-                      <a:pPr algn="ctr">
-                        <a:defRPr sz="800">
-                          <a:solidFill>
-                            <a:srgbClr val="1F2937"/>
-                          </a:solidFill>
-                          <a:latin typeface="Arial"/>
-                        </a:defRPr>
-                      </a:pPr>
-                      <a:r>
-                        <a:t>2026-01-01 00:00:00</a:t>
-                      </a:r>
-                    </a:p>
-                  </a:txBody>
-                  <a:tcPr>
-                    <a:solidFill>
-                      <a:srgbClr val="FFFFFF"/>
-                    </a:solidFill>
-                  </a:tcPr>
-                </a:tc>
-                <a:tc>
-                  <a:txBody>
-                    <a:bodyPr/>
-                    <a:lstStyle/>
-                    <a:p>
-                      <a:pPr algn="ctr">
-                        <a:defRPr sz="800">
-                          <a:solidFill>
-                            <a:srgbClr val="1F2937"/>
-                          </a:solidFill>
-                          <a:latin typeface="Arial"/>
-                        </a:defRPr>
-                      </a:pPr>
-                      <a:r>
-                        <a:t>EQP_01</a:t>
-                      </a:r>
-                    </a:p>
-                  </a:txBody>
-                  <a:tcPr>
-                    <a:solidFill>
-                      <a:srgbClr val="FFFFFF"/>
-                    </a:solidFill>
-                  </a:tcPr>
-                </a:tc>
-                <a:tc>
-                  <a:txBody>
-                    <a:bodyPr/>
-                    <a:lstStyle/>
-                    <a:p>
-                      <a:pPr algn="ctr">
-                        <a:defRPr sz="800">
-                          <a:solidFill>
-                            <a:srgbClr val="1F2937"/>
-                          </a:solidFill>
-                          <a:latin typeface="Arial"/>
-                        </a:defRPr>
-                      </a:pPr>
-                      <a:r>
-                        <a:t>1</a:t>
-                      </a:r>
-                    </a:p>
-                  </a:txBody>
-                  <a:tcPr>
-                    <a:solidFill>
-                      <a:srgbClr val="FFFFFF"/>
-                    </a:solidFill>
-                  </a:tcPr>
-                </a:tc>
-                <a:tc>
-                  <a:txBody>
-                    <a:bodyPr/>
-                    <a:lstStyle/>
-                    <a:p>
-                      <a:pPr algn="ctr">
-                        <a:defRPr sz="800">
-                          <a:solidFill>
-                            <a:srgbClr val="1F2937"/>
-                          </a:solidFill>
-                          <a:latin typeface="Arial"/>
-                        </a:defRPr>
-                      </a:pPr>
-                      <a:r>
-                        <a:t>-1</a:t>
-                      </a:r>
-                    </a:p>
-                  </a:txBody>
-                  <a:tcPr>
-                    <a:solidFill>
-                      <a:srgbClr val="FFFFFF"/>
-                    </a:solidFill>
-                  </a:tcPr>
-                </a:tc>
-                <a:tc>
-                  <a:txBody>
-                    <a:bodyPr/>
-                    <a:lstStyle/>
-                    <a:p>
-                      <a:pPr algn="ctr">
-                        <a:defRPr sz="800">
-                          <a:solidFill>
-                            <a:srgbClr val="1F2937"/>
-                          </a:solidFill>
-                          <a:latin typeface="Arial"/>
-                        </a:defRPr>
-                      </a:pPr>
-                      <a:r>
-                        <a:t>63</a:t>
+                        <a:t>100</a:t>
                       </a:r>
                     </a:p>
                   </a:txBody>
@@ -8957,7 +6632,2473 @@
               </a:defRPr>
             </a:pPr>
             <a:r>
-              <a:t>Detailed raw data should remain in the source database; this deck keeps only mail-sized summary samples.</a:t>
+              <a:t>Template page: statistical table by index and wafer.</a:t>
+            </a:r>
+          </a:p>
+        </p:txBody>
+      </p:sp>
+    </p:spTree>
+  </p:cSld>
+  <p:clrMapOvr>
+    <a:masterClrMapping/>
+  </p:clrMapOvr>
+</p:sld>
+</file>
+
+<file path=ppt/slides/slide6.xml><?xml version="1.0" encoding="utf-8"?>
+<p:sld xmlns:a="http://schemas.openxmlformats.org/drawingml/2006/main" xmlns:p="http://schemas.openxmlformats.org/presentationml/2006/main" xmlns:r="http://schemas.openxmlformats.org/officeDocument/2006/relationships">
+  <p:cSld>
+    <p:spTree>
+      <p:nvGrpSpPr>
+        <p:cNvPr id="1" name=""/>
+        <p:cNvGrpSpPr/>
+        <p:nvPr/>
+      </p:nvGrpSpPr>
+      <p:grpSpPr/>
+      <p:sp>
+        <p:nvSpPr>
+          <p:cNvPr id="2" name="TextBox 1"/>
+          <p:cNvSpPr txBox="1"/>
+          <p:nvPr/>
+        </p:nvSpPr>
+        <p:spPr>
+          <a:xfrm>
+            <a:off x="502920" y="292608"/>
+            <a:ext cx="10789920" cy="411480"/>
+          </a:xfrm>
+          <a:prstGeom prst="rect">
+            <a:avLst/>
+          </a:prstGeom>
+          <a:noFill/>
+        </p:spPr>
+        <p:txBody>
+          <a:bodyPr wrap="square">
+            <a:spAutoFit/>
+          </a:bodyPr>
+          <a:lstStyle/>
+          <a:p>
+            <a:pPr>
+              <a:defRPr sz="2400" b="1">
+                <a:solidFill>
+                  <a:srgbClr val="0B1F33"/>
+                </a:solidFill>
+                <a:latin typeface="Arial"/>
+              </a:defRPr>
+            </a:pPr>
+            <a:r>
+              <a:t>Box Plot - Index 1</a:t>
+            </a:r>
+          </a:p>
+        </p:txBody>
+      </p:sp>
+      <p:sp>
+        <p:nvSpPr>
+          <p:cNvPr id="3" name="Rectangle 2"/>
+          <p:cNvSpPr/>
+          <p:nvPr/>
+        </p:nvSpPr>
+        <p:spPr>
+          <a:xfrm>
+            <a:off x="502920" y="786384"/>
+            <a:ext cx="1143000" cy="45720"/>
+          </a:xfrm>
+          <a:prstGeom prst="rect">
+            <a:avLst/>
+          </a:prstGeom>
+          <a:solidFill>
+            <a:srgbClr val="00A3A3"/>
+          </a:solidFill>
+          <a:ln>
+            <a:noFill/>
+          </a:ln>
+        </p:spPr>
+        <p:style>
+          <a:lnRef idx="1">
+            <a:schemeClr val="accent1"/>
+          </a:lnRef>
+          <a:fillRef idx="3">
+            <a:schemeClr val="accent1"/>
+          </a:fillRef>
+          <a:effectRef idx="2">
+            <a:schemeClr val="accent1"/>
+          </a:effectRef>
+          <a:fontRef idx="minor">
+            <a:schemeClr val="lt1"/>
+          </a:fontRef>
+        </p:style>
+        <p:txBody>
+          <a:bodyPr rtlCol="0" anchor="ctr"/>
+          <a:lstStyle/>
+          <a:p>
+            <a:pPr algn="ctr"/>
+          </a:p>
+        </p:txBody>
+      </p:sp>
+      <p:sp>
+        <p:nvSpPr>
+          <p:cNvPr id="4" name="TextBox 3"/>
+          <p:cNvSpPr txBox="1"/>
+          <p:nvPr/>
+        </p:nvSpPr>
+        <p:spPr>
+          <a:xfrm>
+            <a:off x="1783080" y="704088"/>
+            <a:ext cx="9509760" cy="228600"/>
+          </a:xfrm>
+          <a:prstGeom prst="rect">
+            <a:avLst/>
+          </a:prstGeom>
+          <a:noFill/>
+        </p:spPr>
+        <p:txBody>
+          <a:bodyPr wrap="square">
+            <a:spAutoFit/>
+          </a:bodyPr>
+          <a:lstStyle/>
+          <a:p>
+            <a:pPr>
+              <a:defRPr sz="1000" b="0">
+                <a:solidFill>
+                  <a:srgbClr val="6B7280"/>
+                </a:solidFill>
+                <a:latin typeface="Arial"/>
+              </a:defRPr>
+            </a:pPr>
+            <a:r>
+              <a:t>ADDP_ITEM_01 distribution by wafer</a:t>
+            </a:r>
+          </a:p>
+        </p:txBody>
+      </p:sp>
+      <p:cxnSp>
+        <p:nvCxnSpPr>
+          <p:cNvPr id="5" name="Connector 4"/>
+          <p:cNvCxnSpPr/>
+          <p:nvPr/>
+        </p:nvCxnSpPr>
+        <p:spPr>
+          <a:xfrm>
+            <a:off x="822960" y="5532120"/>
+            <a:ext cx="10424160" cy="0"/>
+          </a:xfrm>
+          <a:prstGeom prst="line">
+            <a:avLst/>
+          </a:prstGeom>
+          <a:ln>
+            <a:solidFill>
+              <a:srgbClr val="94A3B8"/>
+            </a:solidFill>
+          </a:ln>
+        </p:spPr>
+        <p:style>
+          <a:lnRef idx="2">
+            <a:schemeClr val="accent1"/>
+          </a:lnRef>
+          <a:fillRef idx="0">
+            <a:schemeClr val="accent1"/>
+          </a:fillRef>
+          <a:effectRef idx="1">
+            <a:schemeClr val="accent1"/>
+          </a:effectRef>
+          <a:fontRef idx="minor">
+            <a:schemeClr val="tx1"/>
+          </a:fontRef>
+        </p:style>
+      </p:cxnSp>
+      <p:cxnSp>
+        <p:nvCxnSpPr>
+          <p:cNvPr id="6" name="Connector 5"/>
+          <p:cNvCxnSpPr/>
+          <p:nvPr/>
+        </p:nvCxnSpPr>
+        <p:spPr>
+          <a:xfrm>
+            <a:off x="822960" y="1325880"/>
+            <a:ext cx="0" cy="4206240"/>
+          </a:xfrm>
+          <a:prstGeom prst="line">
+            <a:avLst/>
+          </a:prstGeom>
+          <a:ln>
+            <a:solidFill>
+              <a:srgbClr val="94A3B8"/>
+            </a:solidFill>
+          </a:ln>
+        </p:spPr>
+        <p:style>
+          <a:lnRef idx="2">
+            <a:schemeClr val="accent1"/>
+          </a:lnRef>
+          <a:fillRef idx="0">
+            <a:schemeClr val="accent1"/>
+          </a:fillRef>
+          <a:effectRef idx="1">
+            <a:schemeClr val="accent1"/>
+          </a:effectRef>
+          <a:fontRef idx="minor">
+            <a:schemeClr val="tx1"/>
+          </a:fontRef>
+        </p:style>
+      </p:cxnSp>
+      <p:sp>
+        <p:nvSpPr>
+          <p:cNvPr id="7" name="TextBox 6"/>
+          <p:cNvSpPr txBox="1"/>
+          <p:nvPr/>
+        </p:nvSpPr>
+        <p:spPr>
+          <a:xfrm>
+            <a:off x="457200" y="1289304"/>
+            <a:ext cx="320040" cy="182880"/>
+          </a:xfrm>
+          <a:prstGeom prst="rect">
+            <a:avLst/>
+          </a:prstGeom>
+          <a:noFill/>
+        </p:spPr>
+        <p:txBody>
+          <a:bodyPr wrap="square">
+            <a:spAutoFit/>
+          </a:bodyPr>
+          <a:lstStyle/>
+          <a:p>
+            <a:pPr>
+              <a:defRPr sz="700" b="0">
+                <a:solidFill>
+                  <a:srgbClr val="64748B"/>
+                </a:solidFill>
+                <a:latin typeface="Arial"/>
+              </a:defRPr>
+            </a:pPr>
+            <a:r>
+              <a:t>108.0</a:t>
+            </a:r>
+          </a:p>
+        </p:txBody>
+      </p:sp>
+      <p:sp>
+        <p:nvSpPr>
+          <p:cNvPr id="8" name="TextBox 7"/>
+          <p:cNvSpPr txBox="1"/>
+          <p:nvPr/>
+        </p:nvSpPr>
+        <p:spPr>
+          <a:xfrm>
+            <a:off x="457200" y="5458968"/>
+            <a:ext cx="320040" cy="182880"/>
+          </a:xfrm>
+          <a:prstGeom prst="rect">
+            <a:avLst/>
+          </a:prstGeom>
+          <a:noFill/>
+        </p:spPr>
+        <p:txBody>
+          <a:bodyPr wrap="square">
+            <a:spAutoFit/>
+          </a:bodyPr>
+          <a:lstStyle/>
+          <a:p>
+            <a:pPr>
+              <a:defRPr sz="700" b="0">
+                <a:solidFill>
+                  <a:srgbClr val="64748B"/>
+                </a:solidFill>
+                <a:latin typeface="Arial"/>
+              </a:defRPr>
+            </a:pPr>
+            <a:r>
+              <a:t>-8.0</a:t>
+            </a:r>
+          </a:p>
+        </p:txBody>
+      </p:sp>
+      <p:cxnSp>
+        <p:nvCxnSpPr>
+          <p:cNvPr id="9" name="Connector 8"/>
+          <p:cNvCxnSpPr/>
+          <p:nvPr/>
+        </p:nvCxnSpPr>
+        <p:spPr>
+          <a:xfrm>
+            <a:off x="2560320.0" y="3320217.9310344825"/>
+            <a:ext cx="0.0" cy="72521.37931034528"/>
+          </a:xfrm>
+          <a:prstGeom prst="line">
+            <a:avLst/>
+          </a:prstGeom>
+          <a:ln>
+            <a:solidFill>
+              <a:srgbClr val="475569"/>
+            </a:solidFill>
+          </a:ln>
+        </p:spPr>
+        <p:style>
+          <a:lnRef idx="2">
+            <a:schemeClr val="accent1"/>
+          </a:lnRef>
+          <a:fillRef idx="0">
+            <a:schemeClr val="accent1"/>
+          </a:fillRef>
+          <a:effectRef idx="1">
+            <a:schemeClr val="accent1"/>
+          </a:effectRef>
+          <a:fontRef idx="minor">
+            <a:schemeClr val="tx1"/>
+          </a:fontRef>
+        </p:style>
+      </p:cxnSp>
+      <p:sp>
+        <p:nvSpPr>
+          <p:cNvPr id="10" name="Rectangle 9"/>
+          <p:cNvSpPr/>
+          <p:nvPr/>
+        </p:nvSpPr>
+        <p:spPr>
+          <a:xfrm>
+            <a:off x="2308860" y="3338348"/>
+            <a:ext cx="502920" cy="54864"/>
+          </a:xfrm>
+          <a:prstGeom prst="rect">
+            <a:avLst/>
+          </a:prstGeom>
+          <a:solidFill>
+            <a:srgbClr val="DBEAFE"/>
+          </a:solidFill>
+          <a:ln>
+            <a:solidFill>
+              <a:srgbClr val="2563EB"/>
+            </a:solidFill>
+          </a:ln>
+        </p:spPr>
+        <p:style>
+          <a:lnRef idx="1">
+            <a:schemeClr val="accent1"/>
+          </a:lnRef>
+          <a:fillRef idx="3">
+            <a:schemeClr val="accent1"/>
+          </a:fillRef>
+          <a:effectRef idx="2">
+            <a:schemeClr val="accent1"/>
+          </a:effectRef>
+          <a:fontRef idx="minor">
+            <a:schemeClr val="lt1"/>
+          </a:fontRef>
+        </p:style>
+        <p:txBody>
+          <a:bodyPr rtlCol="0" anchor="ctr"/>
+          <a:lstStyle/>
+          <a:p>
+            <a:pPr algn="ctr"/>
+          </a:p>
+        </p:txBody>
+      </p:sp>
+      <p:cxnSp>
+        <p:nvCxnSpPr>
+          <p:cNvPr id="11" name="Connector 10"/>
+          <p:cNvCxnSpPr/>
+          <p:nvPr/>
+        </p:nvCxnSpPr>
+        <p:spPr>
+          <a:xfrm>
+            <a:off x="2308860.0" y="3356478.620689655"/>
+            <a:ext cx="502920.0" cy="0.0"/>
+          </a:xfrm>
+          <a:prstGeom prst="line">
+            <a:avLst/>
+          </a:prstGeom>
+          <a:ln>
+            <a:solidFill>
+              <a:srgbClr val="0F172A"/>
+            </a:solidFill>
+          </a:ln>
+        </p:spPr>
+        <p:style>
+          <a:lnRef idx="2">
+            <a:schemeClr val="accent1"/>
+          </a:lnRef>
+          <a:fillRef idx="0">
+            <a:schemeClr val="accent1"/>
+          </a:fillRef>
+          <a:effectRef idx="1">
+            <a:schemeClr val="accent1"/>
+          </a:effectRef>
+          <a:fontRef idx="minor">
+            <a:schemeClr val="tx1"/>
+          </a:fontRef>
+        </p:style>
+      </p:cxnSp>
+      <p:sp>
+        <p:nvSpPr>
+          <p:cNvPr id="12" name="TextBox 11"/>
+          <p:cNvSpPr txBox="1"/>
+          <p:nvPr/>
+        </p:nvSpPr>
+        <p:spPr>
+          <a:xfrm>
+            <a:off x="2359152" y="5641848"/>
+            <a:ext cx="411480" cy="201168"/>
+          </a:xfrm>
+          <a:prstGeom prst="rect">
+            <a:avLst/>
+          </a:prstGeom>
+          <a:noFill/>
+        </p:spPr>
+        <p:txBody>
+          <a:bodyPr wrap="square">
+            <a:spAutoFit/>
+          </a:bodyPr>
+          <a:lstStyle/>
+          <a:p>
+            <a:pPr>
+              <a:defRPr sz="700" b="0">
+                <a:solidFill>
+                  <a:srgbClr val="64748B"/>
+                </a:solidFill>
+                <a:latin typeface="Arial"/>
+              </a:defRPr>
+            </a:pPr>
+            <a:r>
+              <a:t>W01</a:t>
+            </a:r>
+          </a:p>
+        </p:txBody>
+      </p:sp>
+      <p:cxnSp>
+        <p:nvCxnSpPr>
+          <p:cNvPr id="13" name="Connector 12"/>
+          <p:cNvCxnSpPr/>
+          <p:nvPr/>
+        </p:nvCxnSpPr>
+        <p:spPr>
+          <a:xfrm>
+            <a:off x="6035040.0" y="2957611.034482759"/>
+            <a:ext cx="0.0" cy="72521.37931034435"/>
+          </a:xfrm>
+          <a:prstGeom prst="line">
+            <a:avLst/>
+          </a:prstGeom>
+          <a:ln>
+            <a:solidFill>
+              <a:srgbClr val="475569"/>
+            </a:solidFill>
+          </a:ln>
+        </p:spPr>
+        <p:style>
+          <a:lnRef idx="2">
+            <a:schemeClr val="accent1"/>
+          </a:lnRef>
+          <a:fillRef idx="0">
+            <a:schemeClr val="accent1"/>
+          </a:fillRef>
+          <a:effectRef idx="1">
+            <a:schemeClr val="accent1"/>
+          </a:effectRef>
+          <a:fontRef idx="minor">
+            <a:schemeClr val="tx1"/>
+          </a:fontRef>
+        </p:style>
+      </p:cxnSp>
+      <p:sp>
+        <p:nvSpPr>
+          <p:cNvPr id="14" name="Rectangle 13"/>
+          <p:cNvSpPr/>
+          <p:nvPr/>
+        </p:nvSpPr>
+        <p:spPr>
+          <a:xfrm>
+            <a:off x="5783580" y="2975741"/>
+            <a:ext cx="502920" cy="54864"/>
+          </a:xfrm>
+          <a:prstGeom prst="rect">
+            <a:avLst/>
+          </a:prstGeom>
+          <a:solidFill>
+            <a:srgbClr val="DBEAFE"/>
+          </a:solidFill>
+          <a:ln>
+            <a:solidFill>
+              <a:srgbClr val="2563EB"/>
+            </a:solidFill>
+          </a:ln>
+        </p:spPr>
+        <p:style>
+          <a:lnRef idx="1">
+            <a:schemeClr val="accent1"/>
+          </a:lnRef>
+          <a:fillRef idx="3">
+            <a:schemeClr val="accent1"/>
+          </a:fillRef>
+          <a:effectRef idx="2">
+            <a:schemeClr val="accent1"/>
+          </a:effectRef>
+          <a:fontRef idx="minor">
+            <a:schemeClr val="lt1"/>
+          </a:fontRef>
+        </p:style>
+        <p:txBody>
+          <a:bodyPr rtlCol="0" anchor="ctr"/>
+          <a:lstStyle/>
+          <a:p>
+            <a:pPr algn="ctr"/>
+          </a:p>
+        </p:txBody>
+      </p:sp>
+      <p:cxnSp>
+        <p:nvCxnSpPr>
+          <p:cNvPr id="15" name="Connector 14"/>
+          <p:cNvCxnSpPr/>
+          <p:nvPr/>
+        </p:nvCxnSpPr>
+        <p:spPr>
+          <a:xfrm>
+            <a:off x="5783580.0" y="2993871.724137931"/>
+            <a:ext cx="502920.0" cy="0.0"/>
+          </a:xfrm>
+          <a:prstGeom prst="line">
+            <a:avLst/>
+          </a:prstGeom>
+          <a:ln>
+            <a:solidFill>
+              <a:srgbClr val="0F172A"/>
+            </a:solidFill>
+          </a:ln>
+        </p:spPr>
+        <p:style>
+          <a:lnRef idx="2">
+            <a:schemeClr val="accent1"/>
+          </a:lnRef>
+          <a:fillRef idx="0">
+            <a:schemeClr val="accent1"/>
+          </a:fillRef>
+          <a:effectRef idx="1">
+            <a:schemeClr val="accent1"/>
+          </a:effectRef>
+          <a:fontRef idx="minor">
+            <a:schemeClr val="tx1"/>
+          </a:fontRef>
+        </p:style>
+      </p:cxnSp>
+      <p:sp>
+        <p:nvSpPr>
+          <p:cNvPr id="16" name="TextBox 15"/>
+          <p:cNvSpPr txBox="1"/>
+          <p:nvPr/>
+        </p:nvSpPr>
+        <p:spPr>
+          <a:xfrm>
+            <a:off x="5833872" y="5641848"/>
+            <a:ext cx="411480" cy="201168"/>
+          </a:xfrm>
+          <a:prstGeom prst="rect">
+            <a:avLst/>
+          </a:prstGeom>
+          <a:noFill/>
+        </p:spPr>
+        <p:txBody>
+          <a:bodyPr wrap="square">
+            <a:spAutoFit/>
+          </a:bodyPr>
+          <a:lstStyle/>
+          <a:p>
+            <a:pPr>
+              <a:defRPr sz="700" b="0">
+                <a:solidFill>
+                  <a:srgbClr val="64748B"/>
+                </a:solidFill>
+                <a:latin typeface="Arial"/>
+              </a:defRPr>
+            </a:pPr>
+            <a:r>
+              <a:t>W02</a:t>
+            </a:r>
+          </a:p>
+        </p:txBody>
+      </p:sp>
+      <p:cxnSp>
+        <p:nvCxnSpPr>
+          <p:cNvPr id="17" name="Connector 16"/>
+          <p:cNvCxnSpPr/>
+          <p:nvPr/>
+        </p:nvCxnSpPr>
+        <p:spPr>
+          <a:xfrm>
+            <a:off x="9509760.0" y="2595004.1379310344"/>
+            <a:ext cx="0.0" cy="72521.37931034481"/>
+          </a:xfrm>
+          <a:prstGeom prst="line">
+            <a:avLst/>
+          </a:prstGeom>
+          <a:ln>
+            <a:solidFill>
+              <a:srgbClr val="475569"/>
+            </a:solidFill>
+          </a:ln>
+        </p:spPr>
+        <p:style>
+          <a:lnRef idx="2">
+            <a:schemeClr val="accent1"/>
+          </a:lnRef>
+          <a:fillRef idx="0">
+            <a:schemeClr val="accent1"/>
+          </a:fillRef>
+          <a:effectRef idx="1">
+            <a:schemeClr val="accent1"/>
+          </a:effectRef>
+          <a:fontRef idx="minor">
+            <a:schemeClr val="tx1"/>
+          </a:fontRef>
+        </p:style>
+      </p:cxnSp>
+      <p:sp>
+        <p:nvSpPr>
+          <p:cNvPr id="18" name="Rectangle 17"/>
+          <p:cNvSpPr/>
+          <p:nvPr/>
+        </p:nvSpPr>
+        <p:spPr>
+          <a:xfrm>
+            <a:off x="9258300" y="2613134"/>
+            <a:ext cx="502920" cy="54864"/>
+          </a:xfrm>
+          <a:prstGeom prst="rect">
+            <a:avLst/>
+          </a:prstGeom>
+          <a:solidFill>
+            <a:srgbClr val="DBEAFE"/>
+          </a:solidFill>
+          <a:ln>
+            <a:solidFill>
+              <a:srgbClr val="2563EB"/>
+            </a:solidFill>
+          </a:ln>
+        </p:spPr>
+        <p:style>
+          <a:lnRef idx="1">
+            <a:schemeClr val="accent1"/>
+          </a:lnRef>
+          <a:fillRef idx="3">
+            <a:schemeClr val="accent1"/>
+          </a:fillRef>
+          <a:effectRef idx="2">
+            <a:schemeClr val="accent1"/>
+          </a:effectRef>
+          <a:fontRef idx="minor">
+            <a:schemeClr val="lt1"/>
+          </a:fontRef>
+        </p:style>
+        <p:txBody>
+          <a:bodyPr rtlCol="0" anchor="ctr"/>
+          <a:lstStyle/>
+          <a:p>
+            <a:pPr algn="ctr"/>
+          </a:p>
+        </p:txBody>
+      </p:sp>
+      <p:cxnSp>
+        <p:nvCxnSpPr>
+          <p:cNvPr id="19" name="Connector 18"/>
+          <p:cNvCxnSpPr/>
+          <p:nvPr/>
+        </p:nvCxnSpPr>
+        <p:spPr>
+          <a:xfrm>
+            <a:off x="9258300.0" y="2631264.8275862066"/>
+            <a:ext cx="502920.0" cy="0.0"/>
+          </a:xfrm>
+          <a:prstGeom prst="line">
+            <a:avLst/>
+          </a:prstGeom>
+          <a:ln>
+            <a:solidFill>
+              <a:srgbClr val="0F172A"/>
+            </a:solidFill>
+          </a:ln>
+        </p:spPr>
+        <p:style>
+          <a:lnRef idx="2">
+            <a:schemeClr val="accent1"/>
+          </a:lnRef>
+          <a:fillRef idx="0">
+            <a:schemeClr val="accent1"/>
+          </a:fillRef>
+          <a:effectRef idx="1">
+            <a:schemeClr val="accent1"/>
+          </a:effectRef>
+          <a:fontRef idx="minor">
+            <a:schemeClr val="tx1"/>
+          </a:fontRef>
+        </p:style>
+      </p:cxnSp>
+      <p:sp>
+        <p:nvSpPr>
+          <p:cNvPr id="20" name="TextBox 19"/>
+          <p:cNvSpPr txBox="1"/>
+          <p:nvPr/>
+        </p:nvSpPr>
+        <p:spPr>
+          <a:xfrm>
+            <a:off x="9308592" y="5641848"/>
+            <a:ext cx="411480" cy="201168"/>
+          </a:xfrm>
+          <a:prstGeom prst="rect">
+            <a:avLst/>
+          </a:prstGeom>
+          <a:noFill/>
+        </p:spPr>
+        <p:txBody>
+          <a:bodyPr wrap="square">
+            <a:spAutoFit/>
+          </a:bodyPr>
+          <a:lstStyle/>
+          <a:p>
+            <a:pPr>
+              <a:defRPr sz="700" b="0">
+                <a:solidFill>
+                  <a:srgbClr val="64748B"/>
+                </a:solidFill>
+                <a:latin typeface="Arial"/>
+              </a:defRPr>
+            </a:pPr>
+            <a:r>
+              <a:t>W03</a:t>
+            </a:r>
+          </a:p>
+        </p:txBody>
+      </p:sp>
+      <p:sp>
+        <p:nvSpPr>
+          <p:cNvPr id="21" name="TextBox 20"/>
+          <p:cNvSpPr txBox="1"/>
+          <p:nvPr/>
+        </p:nvSpPr>
+        <p:spPr>
+          <a:xfrm>
+            <a:off x="411480" y="6446520"/>
+            <a:ext cx="11338560" cy="228600"/>
+          </a:xfrm>
+          <a:prstGeom prst="rect">
+            <a:avLst/>
+          </a:prstGeom>
+          <a:noFill/>
+        </p:spPr>
+        <p:txBody>
+          <a:bodyPr wrap="square">
+            <a:spAutoFit/>
+          </a:bodyPr>
+          <a:lstStyle/>
+          <a:p>
+            <a:pPr>
+              <a:defRPr sz="800" b="0">
+                <a:solidFill>
+                  <a:srgbClr val="6B7280"/>
+                </a:solidFill>
+                <a:latin typeface="Arial"/>
+              </a:defRPr>
+            </a:pPr>
+            <a:r>
+              <a:t>Template page: box plot by index across wafers.</a:t>
+            </a:r>
+          </a:p>
+        </p:txBody>
+      </p:sp>
+    </p:spTree>
+  </p:cSld>
+  <p:clrMapOvr>
+    <a:masterClrMapping/>
+  </p:clrMapOvr>
+</p:sld>
+</file>
+
+<file path=ppt/slides/slide7.xml><?xml version="1.0" encoding="utf-8"?>
+<p:sld xmlns:a="http://schemas.openxmlformats.org/drawingml/2006/main" xmlns:p="http://schemas.openxmlformats.org/presentationml/2006/main" xmlns:r="http://schemas.openxmlformats.org/officeDocument/2006/relationships">
+  <p:cSld>
+    <p:spTree>
+      <p:nvGrpSpPr>
+        <p:cNvPr id="1" name=""/>
+        <p:cNvGrpSpPr/>
+        <p:nvPr/>
+      </p:nvGrpSpPr>
+      <p:grpSpPr/>
+      <p:sp>
+        <p:nvSpPr>
+          <p:cNvPr id="2" name="TextBox 1"/>
+          <p:cNvSpPr txBox="1"/>
+          <p:nvPr/>
+        </p:nvSpPr>
+        <p:spPr>
+          <a:xfrm>
+            <a:off x="502920" y="292608"/>
+            <a:ext cx="10789920" cy="411480"/>
+          </a:xfrm>
+          <a:prstGeom prst="rect">
+            <a:avLst/>
+          </a:prstGeom>
+          <a:noFill/>
+        </p:spPr>
+        <p:txBody>
+          <a:bodyPr wrap="square">
+            <a:spAutoFit/>
+          </a:bodyPr>
+          <a:lstStyle/>
+          <a:p>
+            <a:pPr>
+              <a:defRPr sz="2400" b="1">
+                <a:solidFill>
+                  <a:srgbClr val="0B1F33"/>
+                </a:solidFill>
+                <a:latin typeface="Arial"/>
+              </a:defRPr>
+            </a:pPr>
+            <a:r>
+              <a:t>Trend - Index 1</a:t>
+            </a:r>
+          </a:p>
+        </p:txBody>
+      </p:sp>
+      <p:sp>
+        <p:nvSpPr>
+          <p:cNvPr id="3" name="Rectangle 2"/>
+          <p:cNvSpPr/>
+          <p:nvPr/>
+        </p:nvSpPr>
+        <p:spPr>
+          <a:xfrm>
+            <a:off x="502920" y="786384"/>
+            <a:ext cx="1143000" cy="45720"/>
+          </a:xfrm>
+          <a:prstGeom prst="rect">
+            <a:avLst/>
+          </a:prstGeom>
+          <a:solidFill>
+            <a:srgbClr val="00A3A3"/>
+          </a:solidFill>
+          <a:ln>
+            <a:noFill/>
+          </a:ln>
+        </p:spPr>
+        <p:style>
+          <a:lnRef idx="1">
+            <a:schemeClr val="accent1"/>
+          </a:lnRef>
+          <a:fillRef idx="3">
+            <a:schemeClr val="accent1"/>
+          </a:fillRef>
+          <a:effectRef idx="2">
+            <a:schemeClr val="accent1"/>
+          </a:effectRef>
+          <a:fontRef idx="minor">
+            <a:schemeClr val="lt1"/>
+          </a:fontRef>
+        </p:style>
+        <p:txBody>
+          <a:bodyPr rtlCol="0" anchor="ctr"/>
+          <a:lstStyle/>
+          <a:p>
+            <a:pPr algn="ctr"/>
+          </a:p>
+        </p:txBody>
+      </p:sp>
+      <p:sp>
+        <p:nvSpPr>
+          <p:cNvPr id="4" name="TextBox 3"/>
+          <p:cNvSpPr txBox="1"/>
+          <p:nvPr/>
+        </p:nvSpPr>
+        <p:spPr>
+          <a:xfrm>
+            <a:off x="1783080" y="704088"/>
+            <a:ext cx="9509760" cy="228600"/>
+          </a:xfrm>
+          <a:prstGeom prst="rect">
+            <a:avLst/>
+          </a:prstGeom>
+          <a:noFill/>
+        </p:spPr>
+        <p:txBody>
+          <a:bodyPr wrap="square">
+            <a:spAutoFit/>
+          </a:bodyPr>
+          <a:lstStyle/>
+          <a:p>
+            <a:pPr>
+              <a:defRPr sz="1000" b="0">
+                <a:solidFill>
+                  <a:srgbClr val="6B7280"/>
+                </a:solidFill>
+                <a:latin typeface="Arial"/>
+              </a:defRPr>
+            </a:pPr>
+            <a:r>
+              <a:t>ADDP_ITEM_01 wafer median trend</a:t>
+            </a:r>
+          </a:p>
+        </p:txBody>
+      </p:sp>
+      <p:cxnSp>
+        <p:nvCxnSpPr>
+          <p:cNvPr id="5" name="Connector 4"/>
+          <p:cNvCxnSpPr/>
+          <p:nvPr/>
+        </p:nvCxnSpPr>
+        <p:spPr>
+          <a:xfrm>
+            <a:off x="822960" y="5532120"/>
+            <a:ext cx="10424160" cy="0"/>
+          </a:xfrm>
+          <a:prstGeom prst="line">
+            <a:avLst/>
+          </a:prstGeom>
+          <a:ln>
+            <a:solidFill>
+              <a:srgbClr val="94A3B8"/>
+            </a:solidFill>
+          </a:ln>
+        </p:spPr>
+        <p:style>
+          <a:lnRef idx="2">
+            <a:schemeClr val="accent1"/>
+          </a:lnRef>
+          <a:fillRef idx="0">
+            <a:schemeClr val="accent1"/>
+          </a:fillRef>
+          <a:effectRef idx="1">
+            <a:schemeClr val="accent1"/>
+          </a:effectRef>
+          <a:fontRef idx="minor">
+            <a:schemeClr val="tx1"/>
+          </a:fontRef>
+        </p:style>
+      </p:cxnSp>
+      <p:cxnSp>
+        <p:nvCxnSpPr>
+          <p:cNvPr id="6" name="Connector 5"/>
+          <p:cNvCxnSpPr/>
+          <p:nvPr/>
+        </p:nvCxnSpPr>
+        <p:spPr>
+          <a:xfrm>
+            <a:off x="822960" y="1325880"/>
+            <a:ext cx="0" cy="4206240"/>
+          </a:xfrm>
+          <a:prstGeom prst="line">
+            <a:avLst/>
+          </a:prstGeom>
+          <a:ln>
+            <a:solidFill>
+              <a:srgbClr val="94A3B8"/>
+            </a:solidFill>
+          </a:ln>
+        </p:spPr>
+        <p:style>
+          <a:lnRef idx="2">
+            <a:schemeClr val="accent1"/>
+          </a:lnRef>
+          <a:fillRef idx="0">
+            <a:schemeClr val="accent1"/>
+          </a:fillRef>
+          <a:effectRef idx="1">
+            <a:schemeClr val="accent1"/>
+          </a:effectRef>
+          <a:fontRef idx="minor">
+            <a:schemeClr val="tx1"/>
+          </a:fontRef>
+        </p:style>
+      </p:cxnSp>
+      <p:sp>
+        <p:nvSpPr>
+          <p:cNvPr id="7" name="TextBox 6"/>
+          <p:cNvSpPr txBox="1"/>
+          <p:nvPr/>
+        </p:nvSpPr>
+        <p:spPr>
+          <a:xfrm>
+            <a:off x="457200" y="1289304"/>
+            <a:ext cx="320040" cy="182880"/>
+          </a:xfrm>
+          <a:prstGeom prst="rect">
+            <a:avLst/>
+          </a:prstGeom>
+          <a:noFill/>
+        </p:spPr>
+        <p:txBody>
+          <a:bodyPr wrap="square">
+            <a:spAutoFit/>
+          </a:bodyPr>
+          <a:lstStyle/>
+          <a:p>
+            <a:pPr>
+              <a:defRPr sz="700" b="0">
+                <a:solidFill>
+                  <a:srgbClr val="64748B"/>
+                </a:solidFill>
+                <a:latin typeface="Arial"/>
+              </a:defRPr>
+            </a:pPr>
+            <a:r>
+              <a:t>108.0</a:t>
+            </a:r>
+          </a:p>
+        </p:txBody>
+      </p:sp>
+      <p:sp>
+        <p:nvSpPr>
+          <p:cNvPr id="8" name="TextBox 7"/>
+          <p:cNvSpPr txBox="1"/>
+          <p:nvPr/>
+        </p:nvSpPr>
+        <p:spPr>
+          <a:xfrm>
+            <a:off x="457200" y="5458968"/>
+            <a:ext cx="320040" cy="182880"/>
+          </a:xfrm>
+          <a:prstGeom prst="rect">
+            <a:avLst/>
+          </a:prstGeom>
+          <a:noFill/>
+        </p:spPr>
+        <p:txBody>
+          <a:bodyPr wrap="square">
+            <a:spAutoFit/>
+          </a:bodyPr>
+          <a:lstStyle/>
+          <a:p>
+            <a:pPr>
+              <a:defRPr sz="700" b="0">
+                <a:solidFill>
+                  <a:srgbClr val="64748B"/>
+                </a:solidFill>
+                <a:latin typeface="Arial"/>
+              </a:defRPr>
+            </a:pPr>
+            <a:r>
+              <a:t>-8.0</a:t>
+            </a:r>
+          </a:p>
+        </p:txBody>
+      </p:sp>
+      <p:cxnSp>
+        <p:nvCxnSpPr>
+          <p:cNvPr id="9" name="Connector 8"/>
+          <p:cNvCxnSpPr/>
+          <p:nvPr/>
+        </p:nvCxnSpPr>
+        <p:spPr>
+          <a:xfrm flipV="1">
+            <a:off x="822960.0" y="2993871.724137931"/>
+            <a:ext cx="5212080.0" cy="362606.89655172406"/>
+          </a:xfrm>
+          <a:prstGeom prst="line">
+            <a:avLst/>
+          </a:prstGeom>
+          <a:ln w="25400">
+            <a:solidFill>
+              <a:srgbClr val="00A3A3"/>
+            </a:solidFill>
+          </a:ln>
+        </p:spPr>
+        <p:style>
+          <a:lnRef idx="2">
+            <a:schemeClr val="accent1"/>
+          </a:lnRef>
+          <a:fillRef idx="0">
+            <a:schemeClr val="accent1"/>
+          </a:fillRef>
+          <a:effectRef idx="1">
+            <a:schemeClr val="accent1"/>
+          </a:effectRef>
+          <a:fontRef idx="minor">
+            <a:schemeClr val="tx1"/>
+          </a:fontRef>
+        </p:style>
+      </p:cxnSp>
+      <p:cxnSp>
+        <p:nvCxnSpPr>
+          <p:cNvPr id="10" name="Connector 9"/>
+          <p:cNvCxnSpPr/>
+          <p:nvPr/>
+        </p:nvCxnSpPr>
+        <p:spPr>
+          <a:xfrm flipV="1">
+            <a:off x="6035040.0" y="2631264.8275862066"/>
+            <a:ext cx="5212080.0" cy="362606.8965517245"/>
+          </a:xfrm>
+          <a:prstGeom prst="line">
+            <a:avLst/>
+          </a:prstGeom>
+          <a:ln w="25400">
+            <a:solidFill>
+              <a:srgbClr val="00A3A3"/>
+            </a:solidFill>
+          </a:ln>
+        </p:spPr>
+        <p:style>
+          <a:lnRef idx="2">
+            <a:schemeClr val="accent1"/>
+          </a:lnRef>
+          <a:fillRef idx="0">
+            <a:schemeClr val="accent1"/>
+          </a:fillRef>
+          <a:effectRef idx="1">
+            <a:schemeClr val="accent1"/>
+          </a:effectRef>
+          <a:fontRef idx="minor">
+            <a:schemeClr val="tx1"/>
+          </a:fontRef>
+        </p:style>
+      </p:cxnSp>
+      <p:sp>
+        <p:nvSpPr>
+          <p:cNvPr id="11" name="Oval 10"/>
+          <p:cNvSpPr/>
+          <p:nvPr/>
+        </p:nvSpPr>
+        <p:spPr>
+          <a:xfrm>
+            <a:off x="768096" y="3301614"/>
+            <a:ext cx="109728" cy="109728"/>
+          </a:xfrm>
+          <a:prstGeom prst="ellipse">
+            <a:avLst/>
+          </a:prstGeom>
+          <a:solidFill>
+            <a:srgbClr val="00A3A3"/>
+          </a:solidFill>
+          <a:ln>
+            <a:solidFill>
+              <a:srgbClr val="0F766E"/>
+            </a:solidFill>
+          </a:ln>
+        </p:spPr>
+        <p:style>
+          <a:lnRef idx="1">
+            <a:schemeClr val="accent1"/>
+          </a:lnRef>
+          <a:fillRef idx="3">
+            <a:schemeClr val="accent1"/>
+          </a:fillRef>
+          <a:effectRef idx="2">
+            <a:schemeClr val="accent1"/>
+          </a:effectRef>
+          <a:fontRef idx="minor">
+            <a:schemeClr val="lt1"/>
+          </a:fontRef>
+        </p:style>
+        <p:txBody>
+          <a:bodyPr rtlCol="0" anchor="ctr"/>
+          <a:lstStyle/>
+          <a:p>
+            <a:pPr algn="ctr"/>
+          </a:p>
+        </p:txBody>
+      </p:sp>
+      <p:sp>
+        <p:nvSpPr>
+          <p:cNvPr id="12" name="TextBox 11"/>
+          <p:cNvSpPr txBox="1"/>
+          <p:nvPr/>
+        </p:nvSpPr>
+        <p:spPr>
+          <a:xfrm>
+            <a:off x="594360" y="5641848"/>
+            <a:ext cx="457200" cy="201168"/>
+          </a:xfrm>
+          <a:prstGeom prst="rect">
+            <a:avLst/>
+          </a:prstGeom>
+          <a:noFill/>
+        </p:spPr>
+        <p:txBody>
+          <a:bodyPr wrap="square">
+            <a:spAutoFit/>
+          </a:bodyPr>
+          <a:lstStyle/>
+          <a:p>
+            <a:pPr>
+              <a:defRPr sz="700" b="0">
+                <a:solidFill>
+                  <a:srgbClr val="64748B"/>
+                </a:solidFill>
+                <a:latin typeface="Arial"/>
+              </a:defRPr>
+            </a:pPr>
+            <a:r>
+              <a:t>W01</a:t>
+            </a:r>
+          </a:p>
+        </p:txBody>
+      </p:sp>
+      <p:sp>
+        <p:nvSpPr>
+          <p:cNvPr id="13" name="TextBox 12"/>
+          <p:cNvSpPr txBox="1"/>
+          <p:nvPr/>
+        </p:nvSpPr>
+        <p:spPr>
+          <a:xfrm>
+            <a:off x="594360" y="3063870"/>
+            <a:ext cx="457200" cy="182880"/>
+          </a:xfrm>
+          <a:prstGeom prst="rect">
+            <a:avLst/>
+          </a:prstGeom>
+          <a:noFill/>
+        </p:spPr>
+        <p:txBody>
+          <a:bodyPr wrap="square">
+            <a:spAutoFit/>
+          </a:bodyPr>
+          <a:lstStyle/>
+          <a:p>
+            <a:pPr>
+              <a:defRPr sz="700" b="0">
+                <a:solidFill>
+                  <a:srgbClr val="334155"/>
+                </a:solidFill>
+                <a:latin typeface="Arial"/>
+              </a:defRPr>
+            </a:pPr>
+            <a:r>
+              <a:t>52.0</a:t>
+            </a:r>
+          </a:p>
+        </p:txBody>
+      </p:sp>
+      <p:sp>
+        <p:nvSpPr>
+          <p:cNvPr id="14" name="Oval 13"/>
+          <p:cNvSpPr/>
+          <p:nvPr/>
+        </p:nvSpPr>
+        <p:spPr>
+          <a:xfrm>
+            <a:off x="5980176" y="2939007"/>
+            <a:ext cx="109728" cy="109728"/>
+          </a:xfrm>
+          <a:prstGeom prst="ellipse">
+            <a:avLst/>
+          </a:prstGeom>
+          <a:solidFill>
+            <a:srgbClr val="00A3A3"/>
+          </a:solidFill>
+          <a:ln>
+            <a:solidFill>
+              <a:srgbClr val="0F766E"/>
+            </a:solidFill>
+          </a:ln>
+        </p:spPr>
+        <p:style>
+          <a:lnRef idx="1">
+            <a:schemeClr val="accent1"/>
+          </a:lnRef>
+          <a:fillRef idx="3">
+            <a:schemeClr val="accent1"/>
+          </a:fillRef>
+          <a:effectRef idx="2">
+            <a:schemeClr val="accent1"/>
+          </a:effectRef>
+          <a:fontRef idx="minor">
+            <a:schemeClr val="lt1"/>
+          </a:fontRef>
+        </p:style>
+        <p:txBody>
+          <a:bodyPr rtlCol="0" anchor="ctr"/>
+          <a:lstStyle/>
+          <a:p>
+            <a:pPr algn="ctr"/>
+          </a:p>
+        </p:txBody>
+      </p:sp>
+      <p:sp>
+        <p:nvSpPr>
+          <p:cNvPr id="15" name="TextBox 14"/>
+          <p:cNvSpPr txBox="1"/>
+          <p:nvPr/>
+        </p:nvSpPr>
+        <p:spPr>
+          <a:xfrm>
+            <a:off x="5806440" y="5641848"/>
+            <a:ext cx="457200" cy="201168"/>
+          </a:xfrm>
+          <a:prstGeom prst="rect">
+            <a:avLst/>
+          </a:prstGeom>
+          <a:noFill/>
+        </p:spPr>
+        <p:txBody>
+          <a:bodyPr wrap="square">
+            <a:spAutoFit/>
+          </a:bodyPr>
+          <a:lstStyle/>
+          <a:p>
+            <a:pPr>
+              <a:defRPr sz="700" b="0">
+                <a:solidFill>
+                  <a:srgbClr val="64748B"/>
+                </a:solidFill>
+                <a:latin typeface="Arial"/>
+              </a:defRPr>
+            </a:pPr>
+            <a:r>
+              <a:t>W02</a:t>
+            </a:r>
+          </a:p>
+        </p:txBody>
+      </p:sp>
+      <p:sp>
+        <p:nvSpPr>
+          <p:cNvPr id="16" name="TextBox 15"/>
+          <p:cNvSpPr txBox="1"/>
+          <p:nvPr/>
+        </p:nvSpPr>
+        <p:spPr>
+          <a:xfrm>
+            <a:off x="5806440" y="2701263"/>
+            <a:ext cx="457200" cy="182880"/>
+          </a:xfrm>
+          <a:prstGeom prst="rect">
+            <a:avLst/>
+          </a:prstGeom>
+          <a:noFill/>
+        </p:spPr>
+        <p:txBody>
+          <a:bodyPr wrap="square">
+            <a:spAutoFit/>
+          </a:bodyPr>
+          <a:lstStyle/>
+          <a:p>
+            <a:pPr>
+              <a:defRPr sz="700" b="0">
+                <a:solidFill>
+                  <a:srgbClr val="334155"/>
+                </a:solidFill>
+                <a:latin typeface="Arial"/>
+              </a:defRPr>
+            </a:pPr>
+            <a:r>
+              <a:t>62.0</a:t>
+            </a:r>
+          </a:p>
+        </p:txBody>
+      </p:sp>
+      <p:sp>
+        <p:nvSpPr>
+          <p:cNvPr id="17" name="Oval 16"/>
+          <p:cNvSpPr/>
+          <p:nvPr/>
+        </p:nvSpPr>
+        <p:spPr>
+          <a:xfrm>
+            <a:off x="11192256" y="2576400"/>
+            <a:ext cx="109728" cy="109728"/>
+          </a:xfrm>
+          <a:prstGeom prst="ellipse">
+            <a:avLst/>
+          </a:prstGeom>
+          <a:solidFill>
+            <a:srgbClr val="00A3A3"/>
+          </a:solidFill>
+          <a:ln>
+            <a:solidFill>
+              <a:srgbClr val="0F766E"/>
+            </a:solidFill>
+          </a:ln>
+        </p:spPr>
+        <p:style>
+          <a:lnRef idx="1">
+            <a:schemeClr val="accent1"/>
+          </a:lnRef>
+          <a:fillRef idx="3">
+            <a:schemeClr val="accent1"/>
+          </a:fillRef>
+          <a:effectRef idx="2">
+            <a:schemeClr val="accent1"/>
+          </a:effectRef>
+          <a:fontRef idx="minor">
+            <a:schemeClr val="lt1"/>
+          </a:fontRef>
+        </p:style>
+        <p:txBody>
+          <a:bodyPr rtlCol="0" anchor="ctr"/>
+          <a:lstStyle/>
+          <a:p>
+            <a:pPr algn="ctr"/>
+          </a:p>
+        </p:txBody>
+      </p:sp>
+      <p:sp>
+        <p:nvSpPr>
+          <p:cNvPr id="18" name="TextBox 17"/>
+          <p:cNvSpPr txBox="1"/>
+          <p:nvPr/>
+        </p:nvSpPr>
+        <p:spPr>
+          <a:xfrm>
+            <a:off x="11018520" y="5641848"/>
+            <a:ext cx="457200" cy="201168"/>
+          </a:xfrm>
+          <a:prstGeom prst="rect">
+            <a:avLst/>
+          </a:prstGeom>
+          <a:noFill/>
+        </p:spPr>
+        <p:txBody>
+          <a:bodyPr wrap="square">
+            <a:spAutoFit/>
+          </a:bodyPr>
+          <a:lstStyle/>
+          <a:p>
+            <a:pPr>
+              <a:defRPr sz="700" b="0">
+                <a:solidFill>
+                  <a:srgbClr val="64748B"/>
+                </a:solidFill>
+                <a:latin typeface="Arial"/>
+              </a:defRPr>
+            </a:pPr>
+            <a:r>
+              <a:t>W03</a:t>
+            </a:r>
+          </a:p>
+        </p:txBody>
+      </p:sp>
+      <p:sp>
+        <p:nvSpPr>
+          <p:cNvPr id="19" name="TextBox 18"/>
+          <p:cNvSpPr txBox="1"/>
+          <p:nvPr/>
+        </p:nvSpPr>
+        <p:spPr>
+          <a:xfrm>
+            <a:off x="11018520" y="2338656"/>
+            <a:ext cx="457200" cy="182880"/>
+          </a:xfrm>
+          <a:prstGeom prst="rect">
+            <a:avLst/>
+          </a:prstGeom>
+          <a:noFill/>
+        </p:spPr>
+        <p:txBody>
+          <a:bodyPr wrap="square">
+            <a:spAutoFit/>
+          </a:bodyPr>
+          <a:lstStyle/>
+          <a:p>
+            <a:pPr>
+              <a:defRPr sz="700" b="0">
+                <a:solidFill>
+                  <a:srgbClr val="334155"/>
+                </a:solidFill>
+                <a:latin typeface="Arial"/>
+              </a:defRPr>
+            </a:pPr>
+            <a:r>
+              <a:t>72.0</a:t>
+            </a:r>
+          </a:p>
+        </p:txBody>
+      </p:sp>
+      <p:sp>
+        <p:nvSpPr>
+          <p:cNvPr id="20" name="TextBox 19"/>
+          <p:cNvSpPr txBox="1"/>
+          <p:nvPr/>
+        </p:nvSpPr>
+        <p:spPr>
+          <a:xfrm>
+            <a:off x="411480" y="6446520"/>
+            <a:ext cx="11338560" cy="228600"/>
+          </a:xfrm>
+          <a:prstGeom prst="rect">
+            <a:avLst/>
+          </a:prstGeom>
+          <a:noFill/>
+        </p:spPr>
+        <p:txBody>
+          <a:bodyPr wrap="square">
+            <a:spAutoFit/>
+          </a:bodyPr>
+          <a:lstStyle/>
+          <a:p>
+            <a:pPr>
+              <a:defRPr sz="800" b="0">
+                <a:solidFill>
+                  <a:srgbClr val="6B7280"/>
+                </a:solidFill>
+                <a:latin typeface="Arial"/>
+              </a:defRPr>
+            </a:pPr>
+            <a:r>
+              <a:t>Template page: median trend by index and wafer order.</a:t>
+            </a:r>
+          </a:p>
+        </p:txBody>
+      </p:sp>
+    </p:spTree>
+  </p:cSld>
+  <p:clrMapOvr>
+    <a:masterClrMapping/>
+  </p:clrMapOvr>
+</p:sld>
+</file>
+
+<file path=ppt/slides/slide8.xml><?xml version="1.0" encoding="utf-8"?>
+<p:sld xmlns:a="http://schemas.openxmlformats.org/drawingml/2006/main" xmlns:p="http://schemas.openxmlformats.org/presentationml/2006/main" xmlns:r="http://schemas.openxmlformats.org/officeDocument/2006/relationships">
+  <p:cSld>
+    <p:spTree>
+      <p:nvGrpSpPr>
+        <p:cNvPr id="1" name=""/>
+        <p:cNvGrpSpPr/>
+        <p:nvPr/>
+      </p:nvGrpSpPr>
+      <p:grpSpPr/>
+      <p:sp>
+        <p:nvSpPr>
+          <p:cNvPr id="2" name="TextBox 1"/>
+          <p:cNvSpPr txBox="1"/>
+          <p:nvPr/>
+        </p:nvSpPr>
+        <p:spPr>
+          <a:xfrm>
+            <a:off x="502920" y="292608"/>
+            <a:ext cx="10789920" cy="411480"/>
+          </a:xfrm>
+          <a:prstGeom prst="rect">
+            <a:avLst/>
+          </a:prstGeom>
+          <a:noFill/>
+        </p:spPr>
+        <p:txBody>
+          <a:bodyPr wrap="square">
+            <a:spAutoFit/>
+          </a:bodyPr>
+          <a:lstStyle/>
+          <a:p>
+            <a:pPr>
+              <a:defRPr sz="2400" b="1">
+                <a:solidFill>
+                  <a:srgbClr val="0B1F33"/>
+                </a:solidFill>
+                <a:latin typeface="Arial"/>
+              </a:defRPr>
+            </a:pPr>
+            <a:r>
+              <a:t>WF Map - Index 1</a:t>
+            </a:r>
+          </a:p>
+        </p:txBody>
+      </p:sp>
+      <p:sp>
+        <p:nvSpPr>
+          <p:cNvPr id="3" name="Rectangle 2"/>
+          <p:cNvSpPr/>
+          <p:nvPr/>
+        </p:nvSpPr>
+        <p:spPr>
+          <a:xfrm>
+            <a:off x="502920" y="786384"/>
+            <a:ext cx="1143000" cy="45720"/>
+          </a:xfrm>
+          <a:prstGeom prst="rect">
+            <a:avLst/>
+          </a:prstGeom>
+          <a:solidFill>
+            <a:srgbClr val="00A3A3"/>
+          </a:solidFill>
+          <a:ln>
+            <a:noFill/>
+          </a:ln>
+        </p:spPr>
+        <p:style>
+          <a:lnRef idx="1">
+            <a:schemeClr val="accent1"/>
+          </a:lnRef>
+          <a:fillRef idx="3">
+            <a:schemeClr val="accent1"/>
+          </a:fillRef>
+          <a:effectRef idx="2">
+            <a:schemeClr val="accent1"/>
+          </a:effectRef>
+          <a:fontRef idx="minor">
+            <a:schemeClr val="lt1"/>
+          </a:fontRef>
+        </p:style>
+        <p:txBody>
+          <a:bodyPr rtlCol="0" anchor="ctr"/>
+          <a:lstStyle/>
+          <a:p>
+            <a:pPr algn="ctr"/>
+          </a:p>
+        </p:txBody>
+      </p:sp>
+      <p:sp>
+        <p:nvSpPr>
+          <p:cNvPr id="4" name="TextBox 3"/>
+          <p:cNvSpPr txBox="1"/>
+          <p:nvPr/>
+        </p:nvSpPr>
+        <p:spPr>
+          <a:xfrm>
+            <a:off x="1783080" y="704088"/>
+            <a:ext cx="9509760" cy="228600"/>
+          </a:xfrm>
+          <a:prstGeom prst="rect">
+            <a:avLst/>
+          </a:prstGeom>
+          <a:noFill/>
+        </p:spPr>
+        <p:txBody>
+          <a:bodyPr wrap="square">
+            <a:spAutoFit/>
+          </a:bodyPr>
+          <a:lstStyle/>
+          <a:p>
+            <a:pPr>
+              <a:defRPr sz="1000" b="0">
+                <a:solidFill>
+                  <a:srgbClr val="6B7280"/>
+                </a:solidFill>
+                <a:latin typeface="Arial"/>
+              </a:defRPr>
+            </a:pPr>
+            <a:r>
+              <a:t>ADDP_ITEM_01 wafer map template</a:t>
+            </a:r>
+          </a:p>
+        </p:txBody>
+      </p:sp>
+      <p:sp>
+        <p:nvSpPr>
+          <p:cNvPr id="5" name="Rectangle 4"/>
+          <p:cNvSpPr/>
+          <p:nvPr/>
+        </p:nvSpPr>
+        <p:spPr>
+          <a:xfrm>
+            <a:off x="3886200" y="1920240"/>
+            <a:ext cx="411480" cy="411480"/>
+          </a:xfrm>
+          <a:prstGeom prst="rect">
+            <a:avLst/>
+          </a:prstGeom>
+          <a:solidFill>
+            <a:srgbClr val="FEF9C3"/>
+          </a:solidFill>
+          <a:ln>
+            <a:solidFill>
+              <a:srgbClr val="CBD5E1"/>
+            </a:solidFill>
+          </a:ln>
+        </p:spPr>
+        <p:style>
+          <a:lnRef idx="1">
+            <a:schemeClr val="accent1"/>
+          </a:lnRef>
+          <a:fillRef idx="3">
+            <a:schemeClr val="accent1"/>
+          </a:fillRef>
+          <a:effectRef idx="2">
+            <a:schemeClr val="accent1"/>
+          </a:effectRef>
+          <a:fontRef idx="minor">
+            <a:schemeClr val="lt1"/>
+          </a:fontRef>
+        </p:style>
+        <p:txBody>
+          <a:bodyPr rtlCol="0" anchor="ctr"/>
+          <a:lstStyle/>
+          <a:p>
+            <a:pPr algn="ctr"/>
+          </a:p>
+        </p:txBody>
+      </p:sp>
+      <p:sp>
+        <p:nvSpPr>
+          <p:cNvPr id="6" name="TextBox 5"/>
+          <p:cNvSpPr txBox="1"/>
+          <p:nvPr/>
+        </p:nvSpPr>
+        <p:spPr>
+          <a:xfrm>
+            <a:off x="3886200" y="2039112"/>
+            <a:ext cx="411480" cy="146304"/>
+          </a:xfrm>
+          <a:prstGeom prst="rect">
+            <a:avLst/>
+          </a:prstGeom>
+          <a:noFill/>
+        </p:spPr>
+        <p:txBody>
+          <a:bodyPr wrap="square">
+            <a:spAutoFit/>
+          </a:bodyPr>
+          <a:lstStyle/>
+          <a:p>
+            <a:pPr>
+              <a:defRPr sz="700" b="0">
+                <a:solidFill>
+                  <a:srgbClr val="334155"/>
+                </a:solidFill>
+                <a:latin typeface="Arial"/>
+              </a:defRPr>
+            </a:pPr>
+            <a:r>
+              <a:t>52</a:t>
+            </a:r>
+          </a:p>
+        </p:txBody>
+      </p:sp>
+      <p:sp>
+        <p:nvSpPr>
+          <p:cNvPr id="7" name="Rectangle 6"/>
+          <p:cNvSpPr/>
+          <p:nvPr/>
+        </p:nvSpPr>
+        <p:spPr>
+          <a:xfrm>
+            <a:off x="3886200" y="1508760"/>
+            <a:ext cx="411480" cy="411480"/>
+          </a:xfrm>
+          <a:prstGeom prst="rect">
+            <a:avLst/>
+          </a:prstGeom>
+          <a:solidFill>
+            <a:srgbClr val="FEE2E2"/>
+          </a:solidFill>
+          <a:ln>
+            <a:solidFill>
+              <a:srgbClr val="CBD5E1"/>
+            </a:solidFill>
+          </a:ln>
+        </p:spPr>
+        <p:style>
+          <a:lnRef idx="1">
+            <a:schemeClr val="accent1"/>
+          </a:lnRef>
+          <a:fillRef idx="3">
+            <a:schemeClr val="accent1"/>
+          </a:fillRef>
+          <a:effectRef idx="2">
+            <a:schemeClr val="accent1"/>
+          </a:effectRef>
+          <a:fontRef idx="minor">
+            <a:schemeClr val="lt1"/>
+          </a:fontRef>
+        </p:style>
+        <p:txBody>
+          <a:bodyPr rtlCol="0" anchor="ctr"/>
+          <a:lstStyle/>
+          <a:p>
+            <a:pPr algn="ctr"/>
+          </a:p>
+        </p:txBody>
+      </p:sp>
+      <p:sp>
+        <p:nvSpPr>
+          <p:cNvPr id="8" name="TextBox 7"/>
+          <p:cNvSpPr txBox="1"/>
+          <p:nvPr/>
+        </p:nvSpPr>
+        <p:spPr>
+          <a:xfrm>
+            <a:off x="3886200" y="1627632"/>
+            <a:ext cx="411480" cy="146304"/>
+          </a:xfrm>
+          <a:prstGeom prst="rect">
+            <a:avLst/>
+          </a:prstGeom>
+          <a:noFill/>
+        </p:spPr>
+        <p:txBody>
+          <a:bodyPr wrap="square">
+            <a:spAutoFit/>
+          </a:bodyPr>
+          <a:lstStyle/>
+          <a:p>
+            <a:pPr>
+              <a:defRPr sz="700" b="0">
+                <a:solidFill>
+                  <a:srgbClr val="334155"/>
+                </a:solidFill>
+                <a:latin typeface="Arial"/>
+              </a:defRPr>
+            </a:pPr>
+            <a:r>
+              <a:t>52</a:t>
+            </a:r>
+          </a:p>
+        </p:txBody>
+      </p:sp>
+      <p:sp>
+        <p:nvSpPr>
+          <p:cNvPr id="9" name="Rectangle 8"/>
+          <p:cNvSpPr/>
+          <p:nvPr/>
+        </p:nvSpPr>
+        <p:spPr>
+          <a:xfrm>
+            <a:off x="3886200" y="1097280"/>
+            <a:ext cx="411480" cy="411480"/>
+          </a:xfrm>
+          <a:prstGeom prst="rect">
+            <a:avLst/>
+          </a:prstGeom>
+          <a:solidFill>
+            <a:srgbClr val="FEE2E2"/>
+          </a:solidFill>
+          <a:ln>
+            <a:solidFill>
+              <a:srgbClr val="CBD5E1"/>
+            </a:solidFill>
+          </a:ln>
+        </p:spPr>
+        <p:style>
+          <a:lnRef idx="1">
+            <a:schemeClr val="accent1"/>
+          </a:lnRef>
+          <a:fillRef idx="3">
+            <a:schemeClr val="accent1"/>
+          </a:fillRef>
+          <a:effectRef idx="2">
+            <a:schemeClr val="accent1"/>
+          </a:effectRef>
+          <a:fontRef idx="minor">
+            <a:schemeClr val="lt1"/>
+          </a:fontRef>
+        </p:style>
+        <p:txBody>
+          <a:bodyPr rtlCol="0" anchor="ctr"/>
+          <a:lstStyle/>
+          <a:p>
+            <a:pPr algn="ctr"/>
+          </a:p>
+        </p:txBody>
+      </p:sp>
+      <p:sp>
+        <p:nvSpPr>
+          <p:cNvPr id="10" name="TextBox 9"/>
+          <p:cNvSpPr txBox="1"/>
+          <p:nvPr/>
+        </p:nvSpPr>
+        <p:spPr>
+          <a:xfrm>
+            <a:off x="3886200" y="1216152"/>
+            <a:ext cx="411480" cy="146304"/>
+          </a:xfrm>
+          <a:prstGeom prst="rect">
+            <a:avLst/>
+          </a:prstGeom>
+          <a:noFill/>
+        </p:spPr>
+        <p:txBody>
+          <a:bodyPr wrap="square">
+            <a:spAutoFit/>
+          </a:bodyPr>
+          <a:lstStyle/>
+          <a:p>
+            <a:pPr>
+              <a:defRPr sz="700" b="0">
+                <a:solidFill>
+                  <a:srgbClr val="334155"/>
+                </a:solidFill>
+                <a:latin typeface="Arial"/>
+              </a:defRPr>
+            </a:pPr>
+            <a:r>
+              <a:t>51</a:t>
+            </a:r>
+          </a:p>
+        </p:txBody>
+      </p:sp>
+      <p:sp>
+        <p:nvSpPr>
+          <p:cNvPr id="11" name="Rectangle 10"/>
+          <p:cNvSpPr/>
+          <p:nvPr/>
+        </p:nvSpPr>
+        <p:spPr>
+          <a:xfrm>
+            <a:off x="4297680" y="1920240"/>
+            <a:ext cx="411480" cy="411480"/>
+          </a:xfrm>
+          <a:prstGeom prst="rect">
+            <a:avLst/>
+          </a:prstGeom>
+          <a:solidFill>
+            <a:srgbClr val="DCFCE7"/>
+          </a:solidFill>
+          <a:ln>
+            <a:solidFill>
+              <a:srgbClr val="CBD5E1"/>
+            </a:solidFill>
+          </a:ln>
+        </p:spPr>
+        <p:style>
+          <a:lnRef idx="1">
+            <a:schemeClr val="accent1"/>
+          </a:lnRef>
+          <a:fillRef idx="3">
+            <a:schemeClr val="accent1"/>
+          </a:fillRef>
+          <a:effectRef idx="2">
+            <a:schemeClr val="accent1"/>
+          </a:effectRef>
+          <a:fontRef idx="minor">
+            <a:schemeClr val="lt1"/>
+          </a:fontRef>
+        </p:style>
+        <p:txBody>
+          <a:bodyPr rtlCol="0" anchor="ctr"/>
+          <a:lstStyle/>
+          <a:p>
+            <a:pPr algn="ctr"/>
+          </a:p>
+        </p:txBody>
+      </p:sp>
+      <p:sp>
+        <p:nvSpPr>
+          <p:cNvPr id="12" name="TextBox 11"/>
+          <p:cNvSpPr txBox="1"/>
+          <p:nvPr/>
+        </p:nvSpPr>
+        <p:spPr>
+          <a:xfrm>
+            <a:off x="4297680" y="2039112"/>
+            <a:ext cx="411480" cy="146304"/>
+          </a:xfrm>
+          <a:prstGeom prst="rect">
+            <a:avLst/>
+          </a:prstGeom>
+          <a:noFill/>
+        </p:spPr>
+        <p:txBody>
+          <a:bodyPr wrap="square">
+            <a:spAutoFit/>
+          </a:bodyPr>
+          <a:lstStyle/>
+          <a:p>
+            <a:pPr>
+              <a:defRPr sz="700" b="0">
+                <a:solidFill>
+                  <a:srgbClr val="334155"/>
+                </a:solidFill>
+                <a:latin typeface="Arial"/>
+              </a:defRPr>
+            </a:pPr>
+            <a:r>
+              <a:t>52</a:t>
+            </a:r>
+          </a:p>
+        </p:txBody>
+      </p:sp>
+      <p:sp>
+        <p:nvSpPr>
+          <p:cNvPr id="13" name="Rectangle 12"/>
+          <p:cNvSpPr/>
+          <p:nvPr/>
+        </p:nvSpPr>
+        <p:spPr>
+          <a:xfrm>
+            <a:off x="4297680" y="1508760"/>
+            <a:ext cx="411480" cy="411480"/>
+          </a:xfrm>
+          <a:prstGeom prst="rect">
+            <a:avLst/>
+          </a:prstGeom>
+          <a:solidFill>
+            <a:srgbClr val="FEF9C3"/>
+          </a:solidFill>
+          <a:ln>
+            <a:solidFill>
+              <a:srgbClr val="CBD5E1"/>
+            </a:solidFill>
+          </a:ln>
+        </p:spPr>
+        <p:style>
+          <a:lnRef idx="1">
+            <a:schemeClr val="accent1"/>
+          </a:lnRef>
+          <a:fillRef idx="3">
+            <a:schemeClr val="accent1"/>
+          </a:fillRef>
+          <a:effectRef idx="2">
+            <a:schemeClr val="accent1"/>
+          </a:effectRef>
+          <a:fontRef idx="minor">
+            <a:schemeClr val="lt1"/>
+          </a:fontRef>
+        </p:style>
+        <p:txBody>
+          <a:bodyPr rtlCol="0" anchor="ctr"/>
+          <a:lstStyle/>
+          <a:p>
+            <a:pPr algn="ctr"/>
+          </a:p>
+        </p:txBody>
+      </p:sp>
+      <p:sp>
+        <p:nvSpPr>
+          <p:cNvPr id="14" name="TextBox 13"/>
+          <p:cNvSpPr txBox="1"/>
+          <p:nvPr/>
+        </p:nvSpPr>
+        <p:spPr>
+          <a:xfrm>
+            <a:off x="4297680" y="1627632"/>
+            <a:ext cx="411480" cy="146304"/>
+          </a:xfrm>
+          <a:prstGeom prst="rect">
+            <a:avLst/>
+          </a:prstGeom>
+          <a:noFill/>
+        </p:spPr>
+        <p:txBody>
+          <a:bodyPr wrap="square">
+            <a:spAutoFit/>
+          </a:bodyPr>
+          <a:lstStyle/>
+          <a:p>
+            <a:pPr>
+              <a:defRPr sz="700" b="0">
+                <a:solidFill>
+                  <a:srgbClr val="334155"/>
+                </a:solidFill>
+                <a:latin typeface="Arial"/>
+              </a:defRPr>
+            </a:pPr>
+            <a:r>
+              <a:t>52</a:t>
+            </a:r>
+          </a:p>
+        </p:txBody>
+      </p:sp>
+      <p:sp>
+        <p:nvSpPr>
+          <p:cNvPr id="15" name="Rectangle 14"/>
+          <p:cNvSpPr/>
+          <p:nvPr/>
+        </p:nvSpPr>
+        <p:spPr>
+          <a:xfrm>
+            <a:off x="4297680" y="1097280"/>
+            <a:ext cx="411480" cy="411480"/>
+          </a:xfrm>
+          <a:prstGeom prst="rect">
+            <a:avLst/>
+          </a:prstGeom>
+          <a:solidFill>
+            <a:srgbClr val="FEE2E2"/>
+          </a:solidFill>
+          <a:ln>
+            <a:solidFill>
+              <a:srgbClr val="CBD5E1"/>
+            </a:solidFill>
+          </a:ln>
+        </p:spPr>
+        <p:style>
+          <a:lnRef idx="1">
+            <a:schemeClr val="accent1"/>
+          </a:lnRef>
+          <a:fillRef idx="3">
+            <a:schemeClr val="accent1"/>
+          </a:fillRef>
+          <a:effectRef idx="2">
+            <a:schemeClr val="accent1"/>
+          </a:effectRef>
+          <a:fontRef idx="minor">
+            <a:schemeClr val="lt1"/>
+          </a:fontRef>
+        </p:style>
+        <p:txBody>
+          <a:bodyPr rtlCol="0" anchor="ctr"/>
+          <a:lstStyle/>
+          <a:p>
+            <a:pPr algn="ctr"/>
+          </a:p>
+        </p:txBody>
+      </p:sp>
+      <p:sp>
+        <p:nvSpPr>
+          <p:cNvPr id="16" name="TextBox 15"/>
+          <p:cNvSpPr txBox="1"/>
+          <p:nvPr/>
+        </p:nvSpPr>
+        <p:spPr>
+          <a:xfrm>
+            <a:off x="4297680" y="1216152"/>
+            <a:ext cx="411480" cy="146304"/>
+          </a:xfrm>
+          <a:prstGeom prst="rect">
+            <a:avLst/>
+          </a:prstGeom>
+          <a:noFill/>
+        </p:spPr>
+        <p:txBody>
+          <a:bodyPr wrap="square">
+            <a:spAutoFit/>
+          </a:bodyPr>
+          <a:lstStyle/>
+          <a:p>
+            <a:pPr>
+              <a:defRPr sz="700" b="0">
+                <a:solidFill>
+                  <a:srgbClr val="334155"/>
+                </a:solidFill>
+                <a:latin typeface="Arial"/>
+              </a:defRPr>
+            </a:pPr>
+            <a:r>
+              <a:t>52</a:t>
+            </a:r>
+          </a:p>
+        </p:txBody>
+      </p:sp>
+      <p:sp>
+        <p:nvSpPr>
+          <p:cNvPr id="17" name="Rectangle 16"/>
+          <p:cNvSpPr/>
+          <p:nvPr/>
+        </p:nvSpPr>
+        <p:spPr>
+          <a:xfrm>
+            <a:off x="4709160" y="1920240"/>
+            <a:ext cx="411480" cy="411480"/>
+          </a:xfrm>
+          <a:prstGeom prst="rect">
+            <a:avLst/>
+          </a:prstGeom>
+          <a:solidFill>
+            <a:srgbClr val="DCFCE7"/>
+          </a:solidFill>
+          <a:ln>
+            <a:solidFill>
+              <a:srgbClr val="CBD5E1"/>
+            </a:solidFill>
+          </a:ln>
+        </p:spPr>
+        <p:style>
+          <a:lnRef idx="1">
+            <a:schemeClr val="accent1"/>
+          </a:lnRef>
+          <a:fillRef idx="3">
+            <a:schemeClr val="accent1"/>
+          </a:fillRef>
+          <a:effectRef idx="2">
+            <a:schemeClr val="accent1"/>
+          </a:effectRef>
+          <a:fontRef idx="minor">
+            <a:schemeClr val="lt1"/>
+          </a:fontRef>
+        </p:style>
+        <p:txBody>
+          <a:bodyPr rtlCol="0" anchor="ctr"/>
+          <a:lstStyle/>
+          <a:p>
+            <a:pPr algn="ctr"/>
+          </a:p>
+        </p:txBody>
+      </p:sp>
+      <p:sp>
+        <p:nvSpPr>
+          <p:cNvPr id="18" name="TextBox 17"/>
+          <p:cNvSpPr txBox="1"/>
+          <p:nvPr/>
+        </p:nvSpPr>
+        <p:spPr>
+          <a:xfrm>
+            <a:off x="4709160" y="2039112"/>
+            <a:ext cx="411480" cy="146304"/>
+          </a:xfrm>
+          <a:prstGeom prst="rect">
+            <a:avLst/>
+          </a:prstGeom>
+          <a:noFill/>
+        </p:spPr>
+        <p:txBody>
+          <a:bodyPr wrap="square">
+            <a:spAutoFit/>
+          </a:bodyPr>
+          <a:lstStyle/>
+          <a:p>
+            <a:pPr>
+              <a:defRPr sz="700" b="0">
+                <a:solidFill>
+                  <a:srgbClr val="334155"/>
+                </a:solidFill>
+                <a:latin typeface="Arial"/>
+              </a:defRPr>
+            </a:pPr>
+            <a:r>
+              <a:t>53</a:t>
+            </a:r>
+          </a:p>
+        </p:txBody>
+      </p:sp>
+      <p:sp>
+        <p:nvSpPr>
+          <p:cNvPr id="19" name="Rectangle 18"/>
+          <p:cNvSpPr/>
+          <p:nvPr/>
+        </p:nvSpPr>
+        <p:spPr>
+          <a:xfrm>
+            <a:off x="4709160" y="1508760"/>
+            <a:ext cx="411480" cy="411480"/>
+          </a:xfrm>
+          <a:prstGeom prst="rect">
+            <a:avLst/>
+          </a:prstGeom>
+          <a:solidFill>
+            <a:srgbClr val="DCFCE7"/>
+          </a:solidFill>
+          <a:ln>
+            <a:solidFill>
+              <a:srgbClr val="CBD5E1"/>
+            </a:solidFill>
+          </a:ln>
+        </p:spPr>
+        <p:style>
+          <a:lnRef idx="1">
+            <a:schemeClr val="accent1"/>
+          </a:lnRef>
+          <a:fillRef idx="3">
+            <a:schemeClr val="accent1"/>
+          </a:fillRef>
+          <a:effectRef idx="2">
+            <a:schemeClr val="accent1"/>
+          </a:effectRef>
+          <a:fontRef idx="minor">
+            <a:schemeClr val="lt1"/>
+          </a:fontRef>
+        </p:style>
+        <p:txBody>
+          <a:bodyPr rtlCol="0" anchor="ctr"/>
+          <a:lstStyle/>
+          <a:p>
+            <a:pPr algn="ctr"/>
+          </a:p>
+        </p:txBody>
+      </p:sp>
+      <p:sp>
+        <p:nvSpPr>
+          <p:cNvPr id="20" name="TextBox 19"/>
+          <p:cNvSpPr txBox="1"/>
+          <p:nvPr/>
+        </p:nvSpPr>
+        <p:spPr>
+          <a:xfrm>
+            <a:off x="4709160" y="1627632"/>
+            <a:ext cx="411480" cy="146304"/>
+          </a:xfrm>
+          <a:prstGeom prst="rect">
+            <a:avLst/>
+          </a:prstGeom>
+          <a:noFill/>
+        </p:spPr>
+        <p:txBody>
+          <a:bodyPr wrap="square">
+            <a:spAutoFit/>
+          </a:bodyPr>
+          <a:lstStyle/>
+          <a:p>
+            <a:pPr>
+              <a:defRPr sz="700" b="0">
+                <a:solidFill>
+                  <a:srgbClr val="334155"/>
+                </a:solidFill>
+                <a:latin typeface="Arial"/>
+              </a:defRPr>
+            </a:pPr>
+            <a:r>
+              <a:t>52</a:t>
+            </a:r>
+          </a:p>
+        </p:txBody>
+      </p:sp>
+      <p:sp>
+        <p:nvSpPr>
+          <p:cNvPr id="21" name="Rectangle 20"/>
+          <p:cNvSpPr/>
+          <p:nvPr/>
+        </p:nvSpPr>
+        <p:spPr>
+          <a:xfrm>
+            <a:off x="4709160" y="1097280"/>
+            <a:ext cx="411480" cy="411480"/>
+          </a:xfrm>
+          <a:prstGeom prst="rect">
+            <a:avLst/>
+          </a:prstGeom>
+          <a:solidFill>
+            <a:srgbClr val="FEF9C3"/>
+          </a:solidFill>
+          <a:ln>
+            <a:solidFill>
+              <a:srgbClr val="CBD5E1"/>
+            </a:solidFill>
+          </a:ln>
+        </p:spPr>
+        <p:style>
+          <a:lnRef idx="1">
+            <a:schemeClr val="accent1"/>
+          </a:lnRef>
+          <a:fillRef idx="3">
+            <a:schemeClr val="accent1"/>
+          </a:fillRef>
+          <a:effectRef idx="2">
+            <a:schemeClr val="accent1"/>
+          </a:effectRef>
+          <a:fontRef idx="minor">
+            <a:schemeClr val="lt1"/>
+          </a:fontRef>
+        </p:style>
+        <p:txBody>
+          <a:bodyPr rtlCol="0" anchor="ctr"/>
+          <a:lstStyle/>
+          <a:p>
+            <a:pPr algn="ctr"/>
+          </a:p>
+        </p:txBody>
+      </p:sp>
+      <p:sp>
+        <p:nvSpPr>
+          <p:cNvPr id="22" name="TextBox 21"/>
+          <p:cNvSpPr txBox="1"/>
+          <p:nvPr/>
+        </p:nvSpPr>
+        <p:spPr>
+          <a:xfrm>
+            <a:off x="4709160" y="1216152"/>
+            <a:ext cx="411480" cy="146304"/>
+          </a:xfrm>
+          <a:prstGeom prst="rect">
+            <a:avLst/>
+          </a:prstGeom>
+          <a:noFill/>
+        </p:spPr>
+        <p:txBody>
+          <a:bodyPr wrap="square">
+            <a:spAutoFit/>
+          </a:bodyPr>
+          <a:lstStyle/>
+          <a:p>
+            <a:pPr>
+              <a:defRPr sz="700" b="0">
+                <a:solidFill>
+                  <a:srgbClr val="334155"/>
+                </a:solidFill>
+                <a:latin typeface="Arial"/>
+              </a:defRPr>
+            </a:pPr>
+            <a:r>
+              <a:t>52</a:t>
+            </a:r>
+          </a:p>
+        </p:txBody>
+      </p:sp>
+      <p:sp>
+        <p:nvSpPr>
+          <p:cNvPr id="23" name="TextBox 22"/>
+          <p:cNvSpPr txBox="1"/>
+          <p:nvPr/>
+        </p:nvSpPr>
+        <p:spPr>
+          <a:xfrm>
+            <a:off x="640080" y="1417320"/>
+            <a:ext cx="2651760" cy="411480"/>
+          </a:xfrm>
+          <a:prstGeom prst="rect">
+            <a:avLst/>
+          </a:prstGeom>
+          <a:noFill/>
+        </p:spPr>
+        <p:txBody>
+          <a:bodyPr wrap="square">
+            <a:spAutoFit/>
+          </a:bodyPr>
+          <a:lstStyle/>
+          <a:p>
+            <a:pPr>
+              <a:defRPr sz="1100" b="0">
+                <a:solidFill>
+                  <a:srgbClr val="475569"/>
+                </a:solidFill>
+                <a:latin typeface="Arial"/>
+              </a:defRPr>
+            </a:pPr>
+            <a:r>
+              <a:t>Color scale follows the selected index value range for the displayed wafer.</a:t>
+            </a:r>
+          </a:p>
+        </p:txBody>
+      </p:sp>
+      <p:sp>
+        <p:nvSpPr>
+          <p:cNvPr id="24" name="TextBox 23"/>
+          <p:cNvSpPr txBox="1"/>
+          <p:nvPr/>
+        </p:nvSpPr>
+        <p:spPr>
+          <a:xfrm>
+            <a:off x="640080" y="1965960"/>
+            <a:ext cx="2651760" cy="274320"/>
+          </a:xfrm>
+          <a:prstGeom prst="rect">
+            <a:avLst/>
+          </a:prstGeom>
+          <a:noFill/>
+        </p:spPr>
+        <p:txBody>
+          <a:bodyPr wrap="square">
+            <a:spAutoFit/>
+          </a:bodyPr>
+          <a:lstStyle/>
+          <a:p>
+            <a:pPr>
+              <a:defRPr sz="1400" b="1">
+                <a:solidFill>
+                  <a:srgbClr val="0B1F33"/>
+                </a:solidFill>
+                <a:latin typeface="Arial"/>
+              </a:defRPr>
+            </a:pPr>
+            <a:r>
+              <a:t>Map chips: 9</a:t>
+            </a:r>
+          </a:p>
+        </p:txBody>
+      </p:sp>
+      <p:sp>
+        <p:nvSpPr>
+          <p:cNvPr id="25" name="TextBox 24"/>
+          <p:cNvSpPr txBox="1"/>
+          <p:nvPr/>
+        </p:nvSpPr>
+        <p:spPr>
+          <a:xfrm>
+            <a:off x="411480" y="6446520"/>
+            <a:ext cx="11338560" cy="228600"/>
+          </a:xfrm>
+          <a:prstGeom prst="rect">
+            <a:avLst/>
+          </a:prstGeom>
+          <a:noFill/>
+        </p:spPr>
+        <p:txBody>
+          <a:bodyPr wrap="square">
+            <a:spAutoFit/>
+          </a:bodyPr>
+          <a:lstStyle/>
+          <a:p>
+            <a:pPr>
+              <a:defRPr sz="800" b="0">
+                <a:solidFill>
+                  <a:srgbClr val="6B7280"/>
+                </a:solidFill>
+                <a:latin typeface="Arial"/>
+              </a:defRPr>
+            </a:pPr>
+            <a:r>
+              <a:t>Template page: WF map by index using chip coordinates.</a:t>
             </a:r>
           </a:p>
         </p:txBody>
